--- a/materialien/Videos/07_Abi-Check_Fremde_Chiffren_Fallen/KR_Video_07_Abi-Check_Fremde_Chiffren_Fallen_Folien.pptx
+++ b/materialien/Videos/07_Abi-Check_Fremde_Chiffren_Fallen/KR_Video_07_Abi-Check_Fremde_Chiffren_Fallen_Folien.pptx
@@ -126,65 +126,65 @@
   <p:extLst>
     <p:ext uri="{521415D9-36F7-43E2-AB2F-B90AF26B5E84}">
       <p14:sectionLst xmlns:p14="http://schemas.microsoft.com/office/powerpoint/2010/main">
-        <p14:section name="Einstieg" id="{0224712f-ff6e-6f9a-3b3c-320029f06e45}">
+        <p14:section name="Einstieg" id="{e9b49ce0-499e-ce86-ec47-1581e4a08a5c}">
           <p14:sldIdLst>
             <p14:sldId id="256"/>
             <p14:sldId id="257"/>
           </p14:sldIdLst>
         </p14:section>
-        <p14:section name="Das Verfahren" id="{3f8a6dc4-29da-1990-a246-57ec9f042a8a}">
+        <p14:section name="Das Verfahren" id="{830f63c4-9c03-21e1-0893-3ded372086f9}">
           <p14:sldIdLst>
             <p14:sldId id="258"/>
           </p14:sldIdLst>
         </p14:section>
-        <p14:section name="Schritt 1 und 2" id="{2300ba82-ab18-f7a9-d79e-425c5a3f3488}">
+        <p14:section name="Schritt 1 und 2" id="{7dc6e306-6503-3749-9ab8-a62c35d3637c}">
           <p14:sldIdLst>
             <p14:sldId id="259"/>
             <p14:sldId id="260"/>
           </p14:sldIdLst>
         </p14:section>
-        <p14:section name="Schritt 3: Umkehren" id="{5d42f985-d5fb-5826-8550-eccb6c537b7c}">
+        <p14:section name="Schritt 3: Umkehren" id="{14b0f1c7-d2fe-3b76-e6e6-98324702a7e9}">
           <p14:sldIdLst>
             <p14:sldId id="261"/>
             <p14:sldId id="262"/>
             <p14:sldId id="263"/>
           </p14:sldIdLst>
         </p14:section>
-        <p14:section name="Schritt 4: Einordnen" id="{62fab733-995a-5905-b679-00394d778615}">
+        <p14:section name="Schritt 4: Einordnen" id="{c9ae9625-0b77-b495-2b55-6df73f850322}">
           <p14:sldIdLst>
             <p14:sldId id="264"/>
           </p14:sldIdLst>
         </p14:section>
-        <p14:section name="Schritt 5: Beurteilen" id="{527737fd-fbf0-db39-c1c9-316db1704517}">
+        <p14:section name="Schritt 5: Beurteilen" id="{8ae41dc8-759f-1b5a-3be4-1de0349ea946}">
           <p14:sldIdLst>
             <p14:sldId id="265"/>
             <p14:sldId id="266"/>
             <p14:sldId id="267"/>
           </p14:sldIdLst>
         </p14:section>
-        <p14:section name="Operatoren" id="{9613bf51-90e7-070e-ff6c-eb3c5e6aa37d}">
+        <p14:section name="Operatoren" id="{4a5d84ea-262a-9ed1-bebd-302ebe04278f}">
           <p14:sldIdLst>
             <p14:sldId id="268"/>
             <p14:sldId id="269"/>
           </p14:sldIdLst>
         </p14:section>
-        <p14:section name="Zeitplanung" id="{bcc09c42-180a-2775-cb1d-7a4ab403329b}">
+        <p14:section name="Zeitplanung" id="{91235b44-9f1e-04c0-d011-bcecaf6a3566}">
           <p14:sldIdLst>
             <p14:sldId id="270"/>
           </p14:sldIdLst>
         </p14:section>
-        <p14:section name="Die 10 Fallen" id="{57b9a8af-9282-426d-c73a-6b64f96f5c4b}">
+        <p14:section name="Die 10 Fallen" id="{b237f239-11c5-5eac-c597-e32027016cc4}">
           <p14:sldIdLst>
             <p14:sldId id="271"/>
             <p14:sldId id="272"/>
           </p14:sldIdLst>
         </p14:section>
-        <p14:section name="Checkliste" id="{a3a2eb64-1ce4-889b-7b17-62152026f225}">
+        <p14:section name="Checkliste" id="{a97bea4a-b5b8-3bfe-13e5-8922ecdd0059}">
           <p14:sldIdLst>
             <p14:sldId id="273"/>
           </p14:sldIdLst>
         </p14:section>
-        <p14:section name="Zusammenfassung" id="{94dc7827-6f05-a7e8-0f25-093e4a8a9058}">
+        <p14:section name="Zusammenfassung" id="{81d94d12-20ea-ccc6-c492-202029cc07f3}">
           <p14:sldIdLst>
             <p14:sldId id="274"/>
             <p14:sldId id="275"/>
@@ -3670,7 +3670,7 @@
                         <a:buNone/>
                       </a:pPr>
                       <a:r>
-                        <a:rPr lang="en-US" sz="1600" b="1" dirty="0">
+                        <a:rPr lang="en-US" sz="1400" b="1" dirty="0">
                           <a:solidFill>
                             <a:srgbClr val="1B1B1F"/>
                           </a:solidFill>
@@ -3680,7 +3680,7 @@
                         </a:rPr>
                         <a:t>Kriterium</a:t>
                       </a:r>
-                      <a:endParaRPr lang="en-US" sz="1600" dirty="0">
+                      <a:endParaRPr lang="en-US" sz="1400" dirty="0">
                         <a:latin typeface="Calibri" charset="0"/>
                         <a:ea typeface="Calibri" charset="0"/>
                         <a:cs typeface="Calibri" charset="0"/>
@@ -3738,7 +3738,7 @@
                         <a:buNone/>
                       </a:pPr>
                       <a:r>
-                        <a:rPr lang="en-US" sz="1600" b="1" dirty="0">
+                        <a:rPr lang="en-US" sz="1400" b="1" dirty="0">
                           <a:solidFill>
                             <a:srgbClr val="1B1B1F"/>
                           </a:solidFill>
@@ -3748,7 +3748,7 @@
                         </a:rPr>
                         <a:t>Befund bei der Schaukel-Chiffre</a:t>
                       </a:r>
-                      <a:endParaRPr lang="en-US" sz="1600" dirty="0">
+                      <a:endParaRPr lang="en-US" sz="1400" dirty="0">
                         <a:latin typeface="Calibri" charset="0"/>
                         <a:ea typeface="Calibri" charset="0"/>
                         <a:cs typeface="Calibri" charset="0"/>
@@ -3808,7 +3808,7 @@
                         <a:buNone/>
                       </a:pPr>
                       <a:r>
-                        <a:rPr lang="en-US" sz="1600" dirty="0">
+                        <a:rPr lang="en-US" sz="1400" dirty="0">
                           <a:solidFill>
                             <a:srgbClr val="1B1B1F"/>
                           </a:solidFill>
@@ -3818,7 +3818,7 @@
                         </a:rPr>
                         <a:t>Schlüsselraum / Brute Force</a:t>
                       </a:r>
-                      <a:endParaRPr lang="en-US" sz="1600" dirty="0">
+                      <a:endParaRPr lang="en-US" sz="1400" dirty="0">
                         <a:latin typeface="Calibri" charset="0"/>
                         <a:ea typeface="Calibri" charset="0"/>
                         <a:cs typeface="Calibri" charset="0"/>
@@ -3876,7 +3876,7 @@
                         <a:buNone/>
                       </a:pPr>
                       <a:r>
-                        <a:rPr lang="en-US" sz="1600" dirty="0">
+                        <a:rPr lang="en-US" sz="1400" dirty="0">
                           <a:solidFill>
                             <a:srgbClr val="1B1B1F"/>
                           </a:solidFill>
@@ -3887,7 +3887,7 @@
                         <a:t>26 · 26 = </a:t>
                       </a:r>
                       <a:r>
-                        <a:rPr lang="en-US" sz="1600" b="1" dirty="0">
+                        <a:rPr lang="en-US" sz="1400" b="1" dirty="0">
                           <a:solidFill>
                             <a:srgbClr val="1B1B1F"/>
                           </a:solidFill>
@@ -3898,7 +3898,7 @@
                         <a:t>676</a:t>
                       </a:r>
                       <a:r>
-                        <a:rPr lang="en-US" sz="1600" dirty="0">
+                        <a:rPr lang="en-US" sz="1400" dirty="0">
                           <a:solidFill>
                             <a:srgbClr val="1B1B1F"/>
                           </a:solidFill>
@@ -3908,7 +3908,7 @@
                         </a:rPr>
                         <a:t> Schlüssel – schnell durchprobiert</a:t>
                       </a:r>
-                      <a:endParaRPr lang="en-US" sz="1600" dirty="0">
+                      <a:endParaRPr lang="en-US" sz="1400" dirty="0">
                         <a:latin typeface="Calibri" charset="0"/>
                         <a:ea typeface="Calibri" charset="0"/>
                         <a:cs typeface="Calibri" charset="0"/>
@@ -3968,7 +3968,7 @@
                         <a:buNone/>
                       </a:pPr>
                       <a:r>
-                        <a:rPr lang="en-US" sz="1600" dirty="0">
+                        <a:rPr lang="en-US" sz="1400" dirty="0">
                           <a:solidFill>
                             <a:srgbClr val="1B1B1F"/>
                           </a:solidFill>
@@ -3978,7 +3978,7 @@
                         </a:rPr>
                         <a:t>Häufigkeitsanalyse</a:t>
                       </a:r>
-                      <a:endParaRPr lang="en-US" sz="1600" dirty="0">
+                      <a:endParaRPr lang="en-US" sz="1400" dirty="0">
                         <a:latin typeface="Calibri" charset="0"/>
                         <a:ea typeface="Calibri" charset="0"/>
                         <a:cs typeface="Calibri" charset="0"/>
@@ -4036,7 +4036,7 @@
                         <a:buNone/>
                       </a:pPr>
                       <a:r>
-                        <a:rPr lang="en-US" sz="1600" dirty="0">
+                        <a:rPr lang="en-US" sz="1400" dirty="0">
                           <a:solidFill>
                             <a:srgbClr val="1B1B1F"/>
                           </a:solidFill>
@@ -4046,7 +4046,7 @@
                         </a:rPr>
                         <a:t>2 Teiltexte (gerade/ungerade Pos.), je eine Verschiebung; Stufe 1 ändert keine Häufigkeiten</a:t>
                       </a:r>
-                      <a:endParaRPr lang="en-US" sz="1600" dirty="0">
+                      <a:endParaRPr lang="en-US" sz="1400" dirty="0">
                         <a:latin typeface="Calibri" charset="0"/>
                         <a:ea typeface="Calibri" charset="0"/>
                         <a:cs typeface="Calibri" charset="0"/>
@@ -4106,7 +4106,7 @@
                         <a:buNone/>
                       </a:pPr>
                       <a:r>
-                        <a:rPr lang="en-US" sz="1600" dirty="0">
+                        <a:rPr lang="en-US" sz="1400" dirty="0">
                           <a:solidFill>
                             <a:srgbClr val="1B1B1F"/>
                           </a:solidFill>
@@ -4116,7 +4116,7 @@
                         </a:rPr>
                         <a:t>schwache Schlüssel</a:t>
                       </a:r>
-                      <a:endParaRPr lang="en-US" sz="1600" dirty="0">
+                      <a:endParaRPr lang="en-US" sz="1400" dirty="0">
                         <a:latin typeface="Calibri" charset="0"/>
                         <a:ea typeface="Calibri" charset="0"/>
                         <a:cs typeface="Calibri" charset="0"/>
@@ -4174,7 +4174,7 @@
                         <a:buNone/>
                       </a:pPr>
                       <a:r>
-                        <a:rPr lang="en-US" sz="1600" dirty="0">
+                        <a:rPr lang="en-US" sz="1400" dirty="0">
                           <a:solidFill>
                             <a:srgbClr val="1B1B1F"/>
                           </a:solidFill>
@@ -4184,7 +4184,7 @@
                         </a:rPr>
                         <a:t>s = t (26 Stück) → mono; (0, 0) → nur Blockwende</a:t>
                       </a:r>
-                      <a:endParaRPr lang="en-US" sz="1600" dirty="0">
+                      <a:endParaRPr lang="en-US" sz="1400" dirty="0">
                         <a:latin typeface="Calibri" charset="0"/>
                         <a:ea typeface="Calibri" charset="0"/>
                         <a:cs typeface="Calibri" charset="0"/>
@@ -4244,7 +4244,7 @@
                         <a:buNone/>
                       </a:pPr>
                       <a:r>
-                        <a:rPr lang="en-US" sz="1600" dirty="0">
+                        <a:rPr lang="en-US" sz="1400" dirty="0">
                           <a:solidFill>
                             <a:srgbClr val="1B1B1F"/>
                           </a:solidFill>
@@ -4254,7 +4254,167 @@
                         </a:rPr>
                         <a:t>Mehrfachanwendung</a:t>
                       </a:r>
-                      <a:endParaRPr lang="en-US" sz="1600" dirty="0">
+                      <a:endParaRPr lang="en-US" sz="1400" dirty="0">
+                        <a:latin typeface="Calibri" charset="0"/>
+                        <a:ea typeface="Calibri" charset="0"/>
+                        <a:cs typeface="Calibri" charset="0"/>
+                      </a:endParaRPr>
+                    </a:p>
+                  </a:txBody>
+                  <a:tcPr marL="64008" marR="64008" marT="36576" marB="36576" anchor="ctr">
+                    <a:lnL w="9525" cap="flat" cmpd="sng" algn="ctr">
+                      <a:solidFill>
+                        <a:srgbClr val="D8CDB8"/>
+                      </a:solidFill>
+                      <a:prstDash val="solid"/>
+                      <a:round/>
+                      <a:headEnd type="none" w="med" len="med"/>
+                      <a:tailEnd type="none" w="med" len="med"/>
+                    </a:lnL>
+                    <a:lnR w="9525" cap="flat" cmpd="sng" algn="ctr">
+                      <a:solidFill>
+                        <a:srgbClr val="D8CDB8"/>
+                      </a:solidFill>
+                      <a:prstDash val="solid"/>
+                      <a:round/>
+                      <a:headEnd type="none" w="med" len="med"/>
+                      <a:tailEnd type="none" w="med" len="med"/>
+                    </a:lnR>
+                    <a:lnT w="9525" cap="flat" cmpd="sng" algn="ctr">
+                      <a:solidFill>
+                        <a:srgbClr val="D8CDB8"/>
+                      </a:solidFill>
+                      <a:prstDash val="solid"/>
+                      <a:round/>
+                      <a:headEnd type="none" w="med" len="med"/>
+                      <a:tailEnd type="none" w="med" len="med"/>
+                    </a:lnT>
+                    <a:lnB w="9525" cap="flat" cmpd="sng" algn="ctr">
+                      <a:solidFill>
+                        <a:srgbClr val="D8CDB8"/>
+                      </a:solidFill>
+                      <a:prstDash val="solid"/>
+                      <a:round/>
+                      <a:headEnd type="none" w="med" len="med"/>
+                      <a:tailEnd type="none" w="med" len="med"/>
+                    </a:lnB>
+                    <a:solidFill>
+                      <a:srgbClr val="F3E1C3"/>
+                    </a:solidFill>
+                  </a:tcPr>
+                </a:tc>
+                <a:tc>
+                  <a:txBody>
+                    <a:bodyPr/>
+                    <a:lstStyle/>
+                    <a:p>
+                      <a:pPr algn="l" indent="0" marL="0">
+                        <a:buNone/>
+                      </a:pPr>
+                      <a:r>
+                        <a:rPr lang="en-US" sz="1400" dirty="0">
+                          <a:solidFill>
+                            <a:srgbClr val="1B1B1F"/>
+                          </a:solidFill>
+                          <a:latin typeface="Calibri" pitchFamily="34" charset="0"/>
+                          <a:ea typeface="Calibri" pitchFamily="34" charset="-122"/>
+                          <a:cs typeface="Calibri" pitchFamily="34" charset="-120"/>
+                        </a:rPr>
+                        <a:t>zweimal mit (s, t) = </a:t>
+                      </a:r>
+                      <a:r>
+                        <a:rPr lang="en-US" sz="1400" b="1" dirty="0">
+                          <a:solidFill>
+                            <a:srgbClr val="1B1B1F"/>
+                          </a:solidFill>
+                          <a:latin typeface="Calibri" pitchFamily="34" charset="0"/>
+                          <a:ea typeface="Calibri" pitchFamily="34" charset="-122"/>
+                          <a:cs typeface="Calibri" pitchFamily="34" charset="-120"/>
+                        </a:rPr>
+                        <a:t>Caesar mit s + t</a:t>
+                      </a:r>
+                      <a:r>
+                        <a:rPr lang="en-US" sz="1400" dirty="0">
+                          <a:solidFill>
+                            <a:srgbClr val="1B1B1F"/>
+                          </a:solidFill>
+                          <a:latin typeface="Calibri" pitchFamily="34" charset="0"/>
+                          <a:ea typeface="Calibri" pitchFamily="34" charset="-122"/>
+                          <a:cs typeface="Calibri" pitchFamily="34" charset="-120"/>
+                        </a:rPr>
+                        <a:t> – schwächer!</a:t>
+                      </a:r>
+                      <a:endParaRPr lang="en-US" sz="1400" dirty="0">
+                        <a:latin typeface="Calibri" charset="0"/>
+                        <a:ea typeface="Calibri" charset="0"/>
+                        <a:cs typeface="Calibri" charset="0"/>
+                      </a:endParaRPr>
+                    </a:p>
+                  </a:txBody>
+                  <a:tcPr marL="64008" marR="64008" marT="36576" marB="36576" anchor="ctr">
+                    <a:lnL w="9525" cap="flat" cmpd="sng" algn="ctr">
+                      <a:solidFill>
+                        <a:srgbClr val="D8CDB8"/>
+                      </a:solidFill>
+                      <a:prstDash val="solid"/>
+                      <a:round/>
+                      <a:headEnd type="none" w="med" len="med"/>
+                      <a:tailEnd type="none" w="med" len="med"/>
+                    </a:lnL>
+                    <a:lnR w="9525" cap="flat" cmpd="sng" algn="ctr">
+                      <a:solidFill>
+                        <a:srgbClr val="D8CDB8"/>
+                      </a:solidFill>
+                      <a:prstDash val="solid"/>
+                      <a:round/>
+                      <a:headEnd type="none" w="med" len="med"/>
+                      <a:tailEnd type="none" w="med" len="med"/>
+                    </a:lnR>
+                    <a:lnT w="9525" cap="flat" cmpd="sng" algn="ctr">
+                      <a:solidFill>
+                        <a:srgbClr val="D8CDB8"/>
+                      </a:solidFill>
+                      <a:prstDash val="solid"/>
+                      <a:round/>
+                      <a:headEnd type="none" w="med" len="med"/>
+                      <a:tailEnd type="none" w="med" len="med"/>
+                    </a:lnT>
+                    <a:lnB w="9525" cap="flat" cmpd="sng" algn="ctr">
+                      <a:solidFill>
+                        <a:srgbClr val="D8CDB8"/>
+                      </a:solidFill>
+                      <a:prstDash val="solid"/>
+                      <a:round/>
+                      <a:headEnd type="none" w="med" len="med"/>
+                      <a:tailEnd type="none" w="med" len="med"/>
+                    </a:lnB>
+                    <a:solidFill>
+                      <a:srgbClr val="F3E1C3"/>
+                    </a:solidFill>
+                  </a:tcPr>
+                </a:tc>
+              </a:tr>
+              <a:tr h="0">
+                <a:tc>
+                  <a:txBody>
+                    <a:bodyPr/>
+                    <a:lstStyle/>
+                    <a:p>
+                      <a:pPr algn="l" indent="0" marL="0">
+                        <a:buNone/>
+                      </a:pPr>
+                      <a:r>
+                        <a:rPr lang="en-US" sz="1400" dirty="0">
+                          <a:solidFill>
+                            <a:srgbClr val="1B1B1F"/>
+                          </a:solidFill>
+                          <a:latin typeface="Calibri" pitchFamily="34" charset="0"/>
+                          <a:ea typeface="Calibri" pitchFamily="34" charset="-122"/>
+                          <a:cs typeface="Calibri" pitchFamily="34" charset="-120"/>
+                        </a:rPr>
+                        <a:t>Known-Plaintext</a:t>
+                      </a:r>
+                      <a:endParaRPr lang="en-US" sz="1400" dirty="0">
                         <a:latin typeface="Calibri" charset="0"/>
                         <a:ea typeface="Calibri" charset="0"/>
                         <a:cs typeface="Calibri" charset="0"/>
@@ -4312,7 +4472,7 @@
                         <a:buNone/>
                       </a:pPr>
                       <a:r>
-                        <a:rPr lang="en-US" sz="1600" dirty="0">
+                        <a:rPr lang="en-US" sz="1400" dirty="0">
                           <a:solidFill>
                             <a:srgbClr val="1B1B1F"/>
                           </a:solidFill>
@@ -4320,31 +4480,9 @@
                           <a:ea typeface="Calibri" pitchFamily="34" charset="-122"/>
                           <a:cs typeface="Calibri" pitchFamily="34" charset="-120"/>
                         </a:rPr>
-                        <a:t>zweimal mit (s, t) = </a:t>
+                        <a:t>„nach…“ bekannt → H → L: s = 4, C → N: t = 11</a:t>
                       </a:r>
-                      <a:r>
-                        <a:rPr lang="en-US" sz="1600" b="1" dirty="0">
-                          <a:solidFill>
-                            <a:srgbClr val="1B1B1F"/>
-                          </a:solidFill>
-                          <a:latin typeface="Calibri" pitchFamily="34" charset="0"/>
-                          <a:ea typeface="Calibri" pitchFamily="34" charset="-122"/>
-                          <a:cs typeface="Calibri" pitchFamily="34" charset="-120"/>
-                        </a:rPr>
-                        <a:t>Caesar mit s + t</a:t>
-                      </a:r>
-                      <a:r>
-                        <a:rPr lang="en-US" sz="1600" dirty="0">
-                          <a:solidFill>
-                            <a:srgbClr val="1B1B1F"/>
-                          </a:solidFill>
-                          <a:latin typeface="Calibri" pitchFamily="34" charset="0"/>
-                          <a:ea typeface="Calibri" pitchFamily="34" charset="-122"/>
-                          <a:cs typeface="Calibri" pitchFamily="34" charset="-120"/>
-                        </a:rPr>
-                        <a:t> – schwächer!</a:t>
-                      </a:r>
-                      <a:endParaRPr lang="en-US" sz="1600" dirty="0">
+                      <a:endParaRPr lang="en-US" sz="1400" dirty="0">
                         <a:latin typeface="Calibri" charset="0"/>
                         <a:ea typeface="Calibri" charset="0"/>
                         <a:cs typeface="Calibri" charset="0"/>
@@ -4404,7 +4542,7 @@
                         <a:buNone/>
                       </a:pPr>
                       <a:r>
-                        <a:rPr lang="en-US" sz="1600" dirty="0">
+                        <a:rPr lang="en-US" sz="1400" dirty="0">
                           <a:solidFill>
                             <a:srgbClr val="1B1B1F"/>
                           </a:solidFill>
@@ -4412,9 +4550,9 @@
                           <a:ea typeface="Calibri" pitchFamily="34" charset="-122"/>
                           <a:cs typeface="Calibri" pitchFamily="34" charset="-120"/>
                         </a:rPr>
-                        <a:t>Known-Plaintext</a:t>
+                        <a:t>Fehlerfortpflanzung</a:t>
                       </a:r>
-                      <a:endParaRPr lang="en-US" sz="1600" dirty="0">
+                      <a:endParaRPr lang="en-US" sz="1400" dirty="0">
                         <a:latin typeface="Calibri" charset="0"/>
                         <a:ea typeface="Calibri" charset="0"/>
                         <a:cs typeface="Calibri" charset="0"/>
@@ -4472,7 +4610,7 @@
                         <a:buNone/>
                       </a:pPr>
                       <a:r>
-                        <a:rPr lang="en-US" sz="1600" dirty="0">
+                        <a:rPr lang="en-US" sz="1400" dirty="0">
                           <a:solidFill>
                             <a:srgbClr val="1B1B1F"/>
                           </a:solidFill>
@@ -4480,9 +4618,9 @@
                           <a:ea typeface="Calibri" pitchFamily="34" charset="-122"/>
                           <a:cs typeface="Calibri" pitchFamily="34" charset="-120"/>
                         </a:rPr>
-                        <a:t>„nach…“ bekannt → H → L: s = 4, C → N: t = 11</a:t>
+                        <a:t>1 falsches Zeichen → 1 falsches; 1 verlorenes → Rest falsch</a:t>
                       </a:r>
-                      <a:endParaRPr lang="en-US" sz="1600" dirty="0">
+                      <a:endParaRPr lang="en-US" sz="1400" dirty="0">
                         <a:latin typeface="Calibri" charset="0"/>
                         <a:ea typeface="Calibri" charset="0"/>
                         <a:cs typeface="Calibri" charset="0"/>
@@ -4542,7 +4680,7 @@
                         <a:buNone/>
                       </a:pPr>
                       <a:r>
-                        <a:rPr lang="en-US" sz="1600" dirty="0">
+                        <a:rPr lang="en-US" sz="1400" dirty="0">
                           <a:solidFill>
                             <a:srgbClr val="1B1B1F"/>
                           </a:solidFill>
@@ -4550,9 +4688,9 @@
                           <a:ea typeface="Calibri" pitchFamily="34" charset="-122"/>
                           <a:cs typeface="Calibri" pitchFamily="34" charset="-120"/>
                         </a:rPr>
-                        <a:t>Fehlerfortpflanzung</a:t>
+                        <a:t>Kerckhoffs</a:t>
                       </a:r>
-                      <a:endParaRPr lang="en-US" sz="1600" dirty="0">
+                      <a:endParaRPr lang="en-US" sz="1400" dirty="0">
                         <a:latin typeface="Calibri" charset="0"/>
                         <a:ea typeface="Calibri" charset="0"/>
                         <a:cs typeface="Calibri" charset="0"/>
@@ -4610,145 +4748,7 @@
                         <a:buNone/>
                       </a:pPr>
                       <a:r>
-                        <a:rPr lang="en-US" sz="1600" dirty="0">
-                          <a:solidFill>
-                            <a:srgbClr val="1B1B1F"/>
-                          </a:solidFill>
-                          <a:latin typeface="Calibri" pitchFamily="34" charset="0"/>
-                          <a:ea typeface="Calibri" pitchFamily="34" charset="-122"/>
-                          <a:cs typeface="Calibri" pitchFamily="34" charset="-120"/>
-                        </a:rPr>
-                        <a:t>1 falsches Zeichen → 1 falsches; 1 verlorenes → Rest falsch</a:t>
-                      </a:r>
-                      <a:endParaRPr lang="en-US" sz="1600" dirty="0">
-                        <a:latin typeface="Calibri" charset="0"/>
-                        <a:ea typeface="Calibri" charset="0"/>
-                        <a:cs typeface="Calibri" charset="0"/>
-                      </a:endParaRPr>
-                    </a:p>
-                  </a:txBody>
-                  <a:tcPr marL="64008" marR="64008" marT="36576" marB="36576" anchor="ctr">
-                    <a:lnL w="9525" cap="flat" cmpd="sng" algn="ctr">
-                      <a:solidFill>
-                        <a:srgbClr val="D8CDB8"/>
-                      </a:solidFill>
-                      <a:prstDash val="solid"/>
-                      <a:round/>
-                      <a:headEnd type="none" w="med" len="med"/>
-                      <a:tailEnd type="none" w="med" len="med"/>
-                    </a:lnL>
-                    <a:lnR w="9525" cap="flat" cmpd="sng" algn="ctr">
-                      <a:solidFill>
-                        <a:srgbClr val="D8CDB8"/>
-                      </a:solidFill>
-                      <a:prstDash val="solid"/>
-                      <a:round/>
-                      <a:headEnd type="none" w="med" len="med"/>
-                      <a:tailEnd type="none" w="med" len="med"/>
-                    </a:lnR>
-                    <a:lnT w="9525" cap="flat" cmpd="sng" algn="ctr">
-                      <a:solidFill>
-                        <a:srgbClr val="D8CDB8"/>
-                      </a:solidFill>
-                      <a:prstDash val="solid"/>
-                      <a:round/>
-                      <a:headEnd type="none" w="med" len="med"/>
-                      <a:tailEnd type="none" w="med" len="med"/>
-                    </a:lnT>
-                    <a:lnB w="9525" cap="flat" cmpd="sng" algn="ctr">
-                      <a:solidFill>
-                        <a:srgbClr val="D8CDB8"/>
-                      </a:solidFill>
-                      <a:prstDash val="solid"/>
-                      <a:round/>
-                      <a:headEnd type="none" w="med" len="med"/>
-                      <a:tailEnd type="none" w="med" len="med"/>
-                    </a:lnB>
-                    <a:solidFill>
-                      <a:srgbClr val="FFFFFF"/>
-                    </a:solidFill>
-                  </a:tcPr>
-                </a:tc>
-              </a:tr>
-              <a:tr h="0">
-                <a:tc>
-                  <a:txBody>
-                    <a:bodyPr/>
-                    <a:lstStyle/>
-                    <a:p>
-                      <a:pPr algn="l" indent="0" marL="0">
-                        <a:buNone/>
-                      </a:pPr>
-                      <a:r>
-                        <a:rPr lang="en-US" sz="1600" dirty="0">
-                          <a:solidFill>
-                            <a:srgbClr val="1B1B1F"/>
-                          </a:solidFill>
-                          <a:latin typeface="Calibri" pitchFamily="34" charset="0"/>
-                          <a:ea typeface="Calibri" pitchFamily="34" charset="-122"/>
-                          <a:cs typeface="Calibri" pitchFamily="34" charset="-120"/>
-                        </a:rPr>
-                        <a:t>Kerckhoffs</a:t>
-                      </a:r>
-                      <a:endParaRPr lang="en-US" sz="1600" dirty="0">
-                        <a:latin typeface="Calibri" charset="0"/>
-                        <a:ea typeface="Calibri" charset="0"/>
-                        <a:cs typeface="Calibri" charset="0"/>
-                      </a:endParaRPr>
-                    </a:p>
-                  </a:txBody>
-                  <a:tcPr marL="64008" marR="64008" marT="36576" marB="36576" anchor="ctr">
-                    <a:lnL w="9525" cap="flat" cmpd="sng" algn="ctr">
-                      <a:solidFill>
-                        <a:srgbClr val="D8CDB8"/>
-                      </a:solidFill>
-                      <a:prstDash val="solid"/>
-                      <a:round/>
-                      <a:headEnd type="none" w="med" len="med"/>
-                      <a:tailEnd type="none" w="med" len="med"/>
-                    </a:lnL>
-                    <a:lnR w="9525" cap="flat" cmpd="sng" algn="ctr">
-                      <a:solidFill>
-                        <a:srgbClr val="D8CDB8"/>
-                      </a:solidFill>
-                      <a:prstDash val="solid"/>
-                      <a:round/>
-                      <a:headEnd type="none" w="med" len="med"/>
-                      <a:tailEnd type="none" w="med" len="med"/>
-                    </a:lnR>
-                    <a:lnT w="9525" cap="flat" cmpd="sng" algn="ctr">
-                      <a:solidFill>
-                        <a:srgbClr val="D8CDB8"/>
-                      </a:solidFill>
-                      <a:prstDash val="solid"/>
-                      <a:round/>
-                      <a:headEnd type="none" w="med" len="med"/>
-                      <a:tailEnd type="none" w="med" len="med"/>
-                    </a:lnT>
-                    <a:lnB w="9525" cap="flat" cmpd="sng" algn="ctr">
-                      <a:solidFill>
-                        <a:srgbClr val="D8CDB8"/>
-                      </a:solidFill>
-                      <a:prstDash val="solid"/>
-                      <a:round/>
-                      <a:headEnd type="none" w="med" len="med"/>
-                      <a:tailEnd type="none" w="med" len="med"/>
-                    </a:lnB>
-                    <a:solidFill>
-                      <a:srgbClr val="FFFFFF"/>
-                    </a:solidFill>
-                  </a:tcPr>
-                </a:tc>
-                <a:tc>
-                  <a:txBody>
-                    <a:bodyPr/>
-                    <a:lstStyle/>
-                    <a:p>
-                      <a:pPr algn="l" indent="0" marL="0">
-                        <a:buNone/>
-                      </a:pPr>
-                      <a:r>
-                        <a:rPr lang="en-US" sz="1600" dirty="0">
+                        <a:rPr lang="en-US" sz="1400" dirty="0">
                           <a:solidFill>
                             <a:srgbClr val="1B1B1F"/>
                           </a:solidFill>
@@ -4759,7 +4759,7 @@
                         <a:t>Stufe 1 ohne Schlüssel → bringt </a:t>
                       </a:r>
                       <a:r>
-                        <a:rPr lang="en-US" sz="1600" b="1" dirty="0">
+                        <a:rPr lang="en-US" sz="1400" b="1" dirty="0">
                           <a:solidFill>
                             <a:srgbClr val="1B1B1F"/>
                           </a:solidFill>
@@ -4770,7 +4770,7 @@
                         <a:t>keine</a:t>
                       </a:r>
                       <a:r>
-                        <a:rPr lang="en-US" sz="1600" dirty="0">
+                        <a:rPr lang="en-US" sz="1400" dirty="0">
                           <a:solidFill>
                             <a:srgbClr val="1B1B1F"/>
                           </a:solidFill>
@@ -4780,7 +4780,7 @@
                         </a:rPr>
                         <a:t> Sicherheit</a:t>
                       </a:r>
-                      <a:endParaRPr lang="en-US" sz="1600" dirty="0">
+                      <a:endParaRPr lang="en-US" sz="1400" dirty="0">
                         <a:latin typeface="Calibri" charset="0"/>
                         <a:ea typeface="Calibri" charset="0"/>
                         <a:cs typeface="Calibri" charset="0"/>
@@ -4954,7 +4954,7 @@
         <p:spPr>
           <a:xfrm>
             <a:off x="548640" y="1325880"/>
-            <a:ext cx="11094415" cy="773176"/>
+            <a:ext cx="7315200" cy="1021080"/>
           </a:xfrm>
           <a:prstGeom prst="rect">
             <a:avLst/>
@@ -4970,14 +4970,14 @@
               <a:buNone/>
             </a:pPr>
             <a:r>
-              <a:rPr lang="en-US" sz="2200" dirty="0">
+              <a:rPr lang="en-US" sz="2000" dirty="0">
                 <a:solidFill>
                   <a:srgbClr val="1B1B1F"/>
                 </a:solidFill>
               </a:rPr>
               <a:t>Kombination erst nachrechnen, dann bewerten – oft entsteht nur ein anderer Schlüssel desselben Verfahrens oder etwas Schwächeres.</a:t>
             </a:r>
-            <a:endParaRPr lang="en-US" sz="2200" dirty="0"/>
+            <a:endParaRPr lang="en-US" sz="2000" dirty="0"/>
           </a:p>
         </p:txBody>
       </p:sp>
@@ -4989,12 +4989,12 @@
         </p:nvSpPr>
         <p:spPr>
           <a:xfrm>
-            <a:off x="548640" y="2281936"/>
-            <a:ext cx="5364328" cy="1769872"/>
+            <a:off x="548640" y="2529840"/>
+            <a:ext cx="3474720" cy="2110740"/>
           </a:xfrm>
           <a:prstGeom prst="roundRect">
             <a:avLst>
-              <a:gd name="adj" fmla="val 4133"/>
+              <a:gd name="adj" fmla="val 3466"/>
             </a:avLst>
           </a:prstGeom>
           <a:solidFill>
@@ -5016,8 +5016,8 @@
         </p:nvSpPr>
         <p:spPr>
           <a:xfrm>
-            <a:off x="822960" y="2464816"/>
-            <a:ext cx="4815688" cy="365760"/>
+            <a:off x="822960" y="2712720"/>
+            <a:ext cx="2926080" cy="365760"/>
           </a:xfrm>
           <a:prstGeom prst="rect">
             <a:avLst/>
@@ -5052,8 +5052,8 @@
         </p:nvSpPr>
         <p:spPr>
           <a:xfrm>
-            <a:off x="822960" y="2967736"/>
-            <a:ext cx="4815688" cy="727456"/>
+            <a:off x="822960" y="3215640"/>
+            <a:ext cx="2926080" cy="1068324"/>
           </a:xfrm>
           <a:prstGeom prst="rect">
             <a:avLst/>
@@ -5088,12 +5088,12 @@
         </p:nvSpPr>
         <p:spPr>
           <a:xfrm>
-            <a:off x="6278728" y="2281936"/>
-            <a:ext cx="5364328" cy="3821684"/>
+            <a:off x="4389120" y="2529840"/>
+            <a:ext cx="3474720" cy="3642360"/>
           </a:xfrm>
           <a:prstGeom prst="roundRect">
             <a:avLst>
-              <a:gd name="adj" fmla="val 1914"/>
+              <a:gd name="adj" fmla="val 2105"/>
             </a:avLst>
           </a:prstGeom>
           <a:solidFill>
@@ -5115,8 +5115,8 @@
         </p:nvSpPr>
         <p:spPr>
           <a:xfrm>
-            <a:off x="6553048" y="2464816"/>
-            <a:ext cx="4815688" cy="365760"/>
+            <a:off x="4663440" y="2712720"/>
+            <a:ext cx="2926080" cy="365760"/>
           </a:xfrm>
           <a:prstGeom prst="rect">
             <a:avLst/>
@@ -5151,8 +5151,8 @@
         </p:nvSpPr>
         <p:spPr>
           <a:xfrm>
-            <a:off x="6553048" y="2967736"/>
-            <a:ext cx="4815688" cy="727456"/>
+            <a:off x="4663440" y="3215640"/>
+            <a:ext cx="2926080" cy="603504"/>
           </a:xfrm>
           <a:prstGeom prst="rect">
             <a:avLst/>
@@ -5168,7 +5168,7 @@
               <a:buNone/>
             </a:pPr>
             <a:r>
-              <a:rPr lang="en-US" sz="2200" dirty="0">
+              <a:rPr lang="en-US" sz="1800" dirty="0">
                 <a:solidFill>
                   <a:srgbClr val="1B1B1F"/>
                 </a:solidFill>
@@ -5176,14 +5176,14 @@
               <a:t>nachtfalter zweimal mit (4, 11) → </a:t>
             </a:r>
             <a:r>
-              <a:rPr lang="en-US" sz="2200" b="1" dirty="0">
+              <a:rPr lang="en-US" sz="1800" b="1" dirty="0">
                 <a:solidFill>
                   <a:srgbClr val="1B1B1F"/>
                 </a:solidFill>
               </a:rPr>
               <a:t>CPRWI UPAIT GM</a:t>
             </a:r>
-            <a:endParaRPr lang="en-US" sz="2200" dirty="0"/>
+            <a:endParaRPr lang="en-US" sz="1800" dirty="0"/>
           </a:p>
         </p:txBody>
       </p:sp>
@@ -5195,8 +5195,8 @@
         </p:nvSpPr>
         <p:spPr>
           <a:xfrm>
-            <a:off x="6553048" y="3823208"/>
-            <a:ext cx="4815688" cy="727456"/>
+            <a:off x="4663440" y="3947160"/>
+            <a:ext cx="2926080" cy="603504"/>
           </a:xfrm>
           <a:prstGeom prst="rect">
             <a:avLst/>
@@ -5212,7 +5212,7 @@
               <a:buNone/>
             </a:pPr>
             <a:r>
-              <a:rPr lang="en-US" sz="2200" dirty="0">
+              <a:rPr lang="en-US" sz="1800" dirty="0">
                 <a:solidFill>
                   <a:srgbClr val="1B1B1F"/>
                 </a:solidFill>
@@ -5220,7 +5220,7 @@
               <a:t>= NACHTFALTERX mit </a:t>
             </a:r>
             <a:r>
-              <a:rPr lang="en-US" sz="2200" b="1" dirty="0">
+              <a:rPr lang="en-US" sz="1800" b="1" dirty="0">
                 <a:solidFill>
                   <a:srgbClr val="1B1B1F"/>
                 </a:solidFill>
@@ -5228,14 +5228,14 @@
               <a:t>Caesar 15</a:t>
             </a:r>
             <a:r>
-              <a:rPr lang="en-US" sz="2200" dirty="0">
+              <a:rPr lang="en-US" sz="1800" dirty="0">
                 <a:solidFill>
                   <a:srgbClr val="1B1B1F"/>
                 </a:solidFill>
               </a:rPr>
               <a:t> verschoben</a:t>
             </a:r>
-            <a:endParaRPr lang="en-US" sz="2200" dirty="0"/>
+            <a:endParaRPr lang="en-US" sz="1800" dirty="0"/>
           </a:p>
         </p:txBody>
       </p:sp>
@@ -5247,8 +5247,8 @@
         </p:nvSpPr>
         <p:spPr>
           <a:xfrm>
-            <a:off x="6553048" y="4678680"/>
-            <a:ext cx="4815688" cy="1068324"/>
+            <a:off x="4663440" y="4678680"/>
+            <a:ext cx="2926080" cy="1161288"/>
           </a:xfrm>
           <a:prstGeom prst="rect">
             <a:avLst/>
@@ -5264,14 +5264,14 @@
               <a:buNone/>
             </a:pPr>
             <a:r>
-              <a:rPr lang="en-US" sz="2200" dirty="0">
+              <a:rPr lang="en-US" sz="1800" dirty="0">
                 <a:solidFill>
                   <a:srgbClr val="1B1B1F"/>
                 </a:solidFill>
               </a:rPr>
               <a:t>Blockwende zweimal = keine Wirkung; s und t landen abwechselnd auf jeder Position → s + t</a:t>
             </a:r>
-            <a:endParaRPr lang="en-US" sz="2200" dirty="0"/>
+            <a:endParaRPr lang="en-US" sz="1800" dirty="0"/>
           </a:p>
         </p:txBody>
       </p:sp>
@@ -5684,7 +5684,7 @@
                         <a:buNone/>
                       </a:pPr>
                       <a:r>
-                        <a:rPr lang="en-US" sz="1600" b="1" dirty="0">
+                        <a:rPr lang="en-US" sz="1500" b="1" dirty="0">
                           <a:solidFill>
                             <a:srgbClr val="1B1B1F"/>
                           </a:solidFill>
@@ -5694,7 +5694,7 @@
                         </a:rPr>
                         <a:t>Operator</a:t>
                       </a:r>
-                      <a:endParaRPr lang="en-US" sz="1600" dirty="0">
+                      <a:endParaRPr lang="en-US" sz="1500" dirty="0">
                         <a:latin typeface="Calibri" charset="0"/>
                         <a:ea typeface="Calibri" charset="0"/>
                         <a:cs typeface="Calibri" charset="0"/>
@@ -5752,7 +5752,7 @@
                         <a:buNone/>
                       </a:pPr>
                       <a:r>
-                        <a:rPr lang="en-US" sz="1600" b="1" dirty="0">
+                        <a:rPr lang="en-US" sz="1500" b="1" dirty="0">
                           <a:solidFill>
                             <a:srgbClr val="1B1B1F"/>
                           </a:solidFill>
@@ -5762,7 +5762,7 @@
                         </a:rPr>
                         <a:t>verlangt</a:t>
                       </a:r>
-                      <a:endParaRPr lang="en-US" sz="1600" dirty="0">
+                      <a:endParaRPr lang="en-US" sz="1500" dirty="0">
                         <a:latin typeface="Calibri" charset="0"/>
                         <a:ea typeface="Calibri" charset="0"/>
                         <a:cs typeface="Calibri" charset="0"/>
@@ -5820,7 +5820,7 @@
                         <a:buNone/>
                       </a:pPr>
                       <a:r>
-                        <a:rPr lang="en-US" sz="1600" b="1" dirty="0">
+                        <a:rPr lang="en-US" sz="1500" b="1" dirty="0">
                           <a:solidFill>
                             <a:srgbClr val="1B1B1F"/>
                           </a:solidFill>
@@ -5830,7 +5830,7 @@
                         </a:rPr>
                         <a:t>Satzanfang</a:t>
                       </a:r>
-                      <a:endParaRPr lang="en-US" sz="1600" dirty="0">
+                      <a:endParaRPr lang="en-US" sz="1500" dirty="0">
                         <a:latin typeface="Calibri" charset="0"/>
                         <a:ea typeface="Calibri" charset="0"/>
                         <a:cs typeface="Calibri" charset="0"/>
@@ -5890,7 +5890,7 @@
                         <a:buNone/>
                       </a:pPr>
                       <a:r>
-                        <a:rPr lang="en-US" sz="1600" dirty="0">
+                        <a:rPr lang="en-US" sz="1500" dirty="0">
                           <a:solidFill>
                             <a:srgbClr val="1B1B1F"/>
                           </a:solidFill>
@@ -5900,7 +5900,7 @@
                         </a:rPr>
                         <a:t>erläutern</a:t>
                       </a:r>
-                      <a:endParaRPr lang="en-US" sz="1600" dirty="0">
+                      <a:endParaRPr lang="en-US" sz="1500" dirty="0">
                         <a:latin typeface="Calibri" charset="0"/>
                         <a:ea typeface="Calibri" charset="0"/>
                         <a:cs typeface="Calibri" charset="0"/>
@@ -5958,7 +5958,7 @@
                         <a:buNone/>
                       </a:pPr>
                       <a:r>
-                        <a:rPr lang="en-US" sz="1600" dirty="0">
+                        <a:rPr lang="en-US" sz="1500" dirty="0">
                           <a:solidFill>
                             <a:srgbClr val="1B1B1F"/>
                           </a:solidFill>
@@ -5969,7 +5969,7 @@
                         <a:t>verständlich machen </a:t>
                       </a:r>
                       <a:r>
-                        <a:rPr lang="en-US" sz="1600" b="1" dirty="0">
+                        <a:rPr lang="en-US" sz="1500" b="1" dirty="0">
                           <a:solidFill>
                             <a:srgbClr val="1B1B1F"/>
                           </a:solidFill>
@@ -5979,7 +5979,7 @@
                         </a:rPr>
                         <a:t>mit Beispiel</a:t>
                       </a:r>
-                      <a:endParaRPr lang="en-US" sz="1600" dirty="0">
+                      <a:endParaRPr lang="en-US" sz="1500" dirty="0">
                         <a:latin typeface="Calibri" charset="0"/>
                         <a:ea typeface="Calibri" charset="0"/>
                         <a:cs typeface="Calibri" charset="0"/>
@@ -6037,7 +6037,7 @@
                         <a:buNone/>
                       </a:pPr>
                       <a:r>
-                        <a:rPr lang="en-US" sz="1600" dirty="0">
+                        <a:rPr lang="en-US" sz="1500" dirty="0">
                           <a:solidFill>
                             <a:srgbClr val="1B1B1F"/>
                           </a:solidFill>
@@ -6047,7 +6047,7 @@
                         </a:rPr>
                         <a:t>„Das sieht man am Beispiel …“</a:t>
                       </a:r>
-                      <a:endParaRPr lang="en-US" sz="1600" dirty="0">
+                      <a:endParaRPr lang="en-US" sz="1500" dirty="0">
                         <a:latin typeface="Calibri" charset="0"/>
                         <a:ea typeface="Calibri" charset="0"/>
                         <a:cs typeface="Calibri" charset="0"/>
@@ -6107,7 +6107,7 @@
                         <a:buNone/>
                       </a:pPr>
                       <a:r>
-                        <a:rPr lang="en-US" sz="1600" dirty="0">
+                        <a:rPr lang="en-US" sz="1500" dirty="0">
                           <a:solidFill>
                             <a:srgbClr val="1B1B1F"/>
                           </a:solidFill>
@@ -6117,7 +6117,7 @@
                         </a:rPr>
                         <a:t>begründen</a:t>
                       </a:r>
-                      <a:endParaRPr lang="en-US" sz="1600" dirty="0">
+                      <a:endParaRPr lang="en-US" sz="1500" dirty="0">
                         <a:latin typeface="Calibri" charset="0"/>
                         <a:ea typeface="Calibri" charset="0"/>
                         <a:cs typeface="Calibri" charset="0"/>
@@ -6175,7 +6175,7 @@
                         <a:buNone/>
                       </a:pPr>
                       <a:r>
-                        <a:rPr lang="en-US" sz="1600" dirty="0">
+                        <a:rPr lang="en-US" sz="1500" dirty="0">
                           <a:solidFill>
                             <a:srgbClr val="1B1B1F"/>
                           </a:solidFill>
@@ -6185,7 +6185,7 @@
                         </a:rPr>
                         <a:t>auf Regel oder Ursache zurückführen</a:t>
                       </a:r>
-                      <a:endParaRPr lang="en-US" sz="1600" dirty="0">
+                      <a:endParaRPr lang="en-US" sz="1500" dirty="0">
                         <a:latin typeface="Calibri" charset="0"/>
                         <a:ea typeface="Calibri" charset="0"/>
                         <a:cs typeface="Calibri" charset="0"/>
@@ -6243,7 +6243,7 @@
                         <a:buNone/>
                       </a:pPr>
                       <a:r>
-                        <a:rPr lang="en-US" sz="1600" dirty="0">
+                        <a:rPr lang="en-US" sz="1500" dirty="0">
                           <a:solidFill>
                             <a:srgbClr val="1B1B1F"/>
                           </a:solidFill>
@@ -6253,7 +6253,7 @@
                         </a:rPr>
                         <a:t>„Weil …, deshalb …“</a:t>
                       </a:r>
-                      <a:endParaRPr lang="en-US" sz="1600" dirty="0">
+                      <a:endParaRPr lang="en-US" sz="1500" dirty="0">
                         <a:latin typeface="Calibri" charset="0"/>
                         <a:ea typeface="Calibri" charset="0"/>
                         <a:cs typeface="Calibri" charset="0"/>
@@ -6313,7 +6313,7 @@
                         <a:buNone/>
                       </a:pPr>
                       <a:r>
-                        <a:rPr lang="en-US" sz="1600" dirty="0">
+                        <a:rPr lang="en-US" sz="1500" dirty="0">
                           <a:solidFill>
                             <a:srgbClr val="1B1B1F"/>
                           </a:solidFill>
@@ -6323,7 +6323,7 @@
                         </a:rPr>
                         <a:t>entscheiden (begründet)</a:t>
                       </a:r>
-                      <a:endParaRPr lang="en-US" sz="1600" dirty="0">
+                      <a:endParaRPr lang="en-US" sz="1500" dirty="0">
                         <a:latin typeface="Calibri" charset="0"/>
                         <a:ea typeface="Calibri" charset="0"/>
                         <a:cs typeface="Calibri" charset="0"/>
@@ -6381,7 +6381,7 @@
                         <a:buNone/>
                       </a:pPr>
                       <a:r>
-                        <a:rPr lang="en-US" sz="1600" dirty="0">
+                        <a:rPr lang="en-US" sz="1500" dirty="0">
                           <a:solidFill>
                             <a:srgbClr val="1B1B1F"/>
                           </a:solidFill>
@@ -6392,7 +6392,7 @@
                         <a:t>klare Entscheidung </a:t>
                       </a:r>
                       <a:r>
-                        <a:rPr lang="en-US" sz="1600" b="1" dirty="0">
+                        <a:rPr lang="en-US" sz="1500" b="1" dirty="0">
                           <a:solidFill>
                             <a:srgbClr val="1B1B1F"/>
                           </a:solidFill>
@@ -6403,7 +6403,7 @@
                         <a:t>und</a:t>
                       </a:r>
                       <a:r>
-                        <a:rPr lang="en-US" sz="1600" dirty="0">
+                        <a:rPr lang="en-US" sz="1500" dirty="0">
                           <a:solidFill>
                             <a:srgbClr val="1B1B1F"/>
                           </a:solidFill>
@@ -6413,7 +6413,7 @@
                         </a:rPr>
                         <a:t> Begründung</a:t>
                       </a:r>
-                      <a:endParaRPr lang="en-US" sz="1600" dirty="0">
+                      <a:endParaRPr lang="en-US" sz="1500" dirty="0">
                         <a:latin typeface="Calibri" charset="0"/>
                         <a:ea typeface="Calibri" charset="0"/>
                         <a:cs typeface="Calibri" charset="0"/>
@@ -6471,7 +6471,7 @@
                         <a:buNone/>
                       </a:pPr>
                       <a:r>
-                        <a:rPr lang="en-US" sz="1600" dirty="0">
+                        <a:rPr lang="en-US" sz="1500" dirty="0">
                           <a:solidFill>
                             <a:srgbClr val="1B1B1F"/>
                           </a:solidFill>
@@ -6481,7 +6481,7 @@
                         </a:rPr>
                         <a:t>„Die Aussage ist falsch, weil …“</a:t>
                       </a:r>
-                      <a:endParaRPr lang="en-US" sz="1600" dirty="0">
+                      <a:endParaRPr lang="en-US" sz="1500" dirty="0">
                         <a:latin typeface="Calibri" charset="0"/>
                         <a:ea typeface="Calibri" charset="0"/>
                         <a:cs typeface="Calibri" charset="0"/>
@@ -6541,7 +6541,7 @@
                         <a:buNone/>
                       </a:pPr>
                       <a:r>
-                        <a:rPr lang="en-US" sz="1600" dirty="0">
+                        <a:rPr lang="en-US" sz="1500" dirty="0">
                           <a:solidFill>
                             <a:srgbClr val="1B1B1F"/>
                           </a:solidFill>
@@ -6551,7 +6551,7 @@
                         </a:rPr>
                         <a:t>beurteilen</a:t>
                       </a:r>
-                      <a:endParaRPr lang="en-US" sz="1600" dirty="0">
+                      <a:endParaRPr lang="en-US" sz="1500" dirty="0">
                         <a:latin typeface="Calibri" charset="0"/>
                         <a:ea typeface="Calibri" charset="0"/>
                         <a:cs typeface="Calibri" charset="0"/>
@@ -6609,7 +6609,7 @@
                         <a:buNone/>
                       </a:pPr>
                       <a:r>
-                        <a:rPr lang="en-US" sz="1600" dirty="0">
+                        <a:rPr lang="en-US" sz="1500" dirty="0">
                           <a:solidFill>
                             <a:srgbClr val="1B1B1F"/>
                           </a:solidFill>
@@ -6620,7 +6620,7 @@
                         <a:t>Kriterien → Begründung → </a:t>
                       </a:r>
                       <a:r>
-                        <a:rPr lang="en-US" sz="1600" b="1" dirty="0">
+                        <a:rPr lang="en-US" sz="1500" b="1" dirty="0">
                           <a:solidFill>
                             <a:srgbClr val="1B1B1F"/>
                           </a:solidFill>
@@ -6630,7 +6630,7 @@
                         </a:rPr>
                         <a:t>eigenes Urteil</a:t>
                       </a:r>
-                      <a:endParaRPr lang="en-US" sz="1600" dirty="0">
+                      <a:endParaRPr lang="en-US" sz="1500" dirty="0">
                         <a:latin typeface="Calibri" charset="0"/>
                         <a:ea typeface="Calibri" charset="0"/>
                         <a:cs typeface="Calibri" charset="0"/>
@@ -6688,7 +6688,7 @@
                         <a:buNone/>
                       </a:pPr>
                       <a:r>
-                        <a:rPr lang="en-US" sz="1600" dirty="0">
+                        <a:rPr lang="en-US" sz="1500" dirty="0">
                           <a:solidFill>
                             <a:srgbClr val="1B1B1F"/>
                           </a:solidFill>
@@ -6698,7 +6698,7 @@
                         </a:rPr>
                         <a:t>„Gemessen an … ist das Verfahren …“</a:t>
                       </a:r>
-                      <a:endParaRPr lang="en-US" sz="1600" dirty="0">
+                      <a:endParaRPr lang="en-US" sz="1500" dirty="0">
                         <a:latin typeface="Calibri" charset="0"/>
                         <a:ea typeface="Calibri" charset="0"/>
                         <a:cs typeface="Calibri" charset="0"/>
@@ -7508,7 +7508,7 @@
                         <a:buNone/>
                       </a:pPr>
                       <a:r>
-                        <a:rPr lang="en-US" sz="1600" b="1" dirty="0">
+                        <a:rPr lang="en-US" sz="1400" b="1" dirty="0">
                           <a:solidFill>
                             <a:srgbClr val="1B1B1F"/>
                           </a:solidFill>
@@ -7518,7 +7518,7 @@
                         </a:rPr>
                         <a:t>Falle</a:t>
                       </a:r>
-                      <a:endParaRPr lang="en-US" sz="1600" dirty="0">
+                      <a:endParaRPr lang="en-US" sz="1400" dirty="0">
                         <a:latin typeface="Calibri" charset="0"/>
                         <a:ea typeface="Calibri" charset="0"/>
                         <a:cs typeface="Calibri" charset="0"/>
@@ -7576,7 +7576,7 @@
                         <a:buNone/>
                       </a:pPr>
                       <a:r>
-                        <a:rPr lang="en-US" sz="1600" b="1" dirty="0">
+                        <a:rPr lang="en-US" sz="1400" b="1" dirty="0">
                           <a:solidFill>
                             <a:srgbClr val="1B1B1F"/>
                           </a:solidFill>
@@ -7586,7 +7586,7 @@
                         </a:rPr>
                         <a:t>✗ so nicht</a:t>
                       </a:r>
-                      <a:endParaRPr lang="en-US" sz="1600" dirty="0">
+                      <a:endParaRPr lang="en-US" sz="1400" dirty="0">
                         <a:latin typeface="Calibri" charset="0"/>
                         <a:ea typeface="Calibri" charset="0"/>
                         <a:cs typeface="Calibri" charset="0"/>
@@ -7644,7 +7644,7 @@
                         <a:buNone/>
                       </a:pPr>
                       <a:r>
-                        <a:rPr lang="en-US" sz="1600" b="1" dirty="0">
+                        <a:rPr lang="en-US" sz="1400" b="1" dirty="0">
                           <a:solidFill>
                             <a:srgbClr val="1B1B1F"/>
                           </a:solidFill>
@@ -7654,7 +7654,7 @@
                         </a:rPr>
                         <a:t>✓ so geht’s</a:t>
                       </a:r>
-                      <a:endParaRPr lang="en-US" sz="1600" dirty="0">
+                      <a:endParaRPr lang="en-US" sz="1400" dirty="0">
                         <a:latin typeface="Calibri" charset="0"/>
                         <a:ea typeface="Calibri" charset="0"/>
                         <a:cs typeface="Calibri" charset="0"/>
@@ -7714,7 +7714,7 @@
                         <a:buNone/>
                       </a:pPr>
                       <a:r>
-                        <a:rPr lang="en-US" sz="1600" dirty="0">
+                        <a:rPr lang="en-US" sz="1400" dirty="0">
                           <a:solidFill>
                             <a:srgbClr val="1B1B1F"/>
                           </a:solidFill>
@@ -7724,7 +7724,7 @@
                         </a:rPr>
                         <a:t>P1 Zählbasis</a:t>
                       </a:r>
-                      <a:endParaRPr lang="en-US" sz="1600" dirty="0">
+                      <a:endParaRPr lang="en-US" sz="1400" dirty="0">
                         <a:latin typeface="Calibri" charset="0"/>
                         <a:ea typeface="Calibri" charset="0"/>
                         <a:cs typeface="Calibri" charset="0"/>
@@ -7782,7 +7782,7 @@
                         <a:buNone/>
                       </a:pPr>
                       <a:r>
-                        <a:rPr lang="en-US" sz="1600" dirty="0">
+                        <a:rPr lang="en-US" sz="1400" dirty="0">
                           <a:solidFill>
                             <a:srgbClr val="1B1B1F"/>
                           </a:solidFill>
@@ -7792,7 +7792,7 @@
                         </a:rPr>
                         <a:t>Positionen ab 1 → s und t vertauscht</a:t>
                       </a:r>
-                      <a:endParaRPr lang="en-US" sz="1600" dirty="0">
+                      <a:endParaRPr lang="en-US" sz="1400" dirty="0">
                         <a:latin typeface="Calibri" charset="0"/>
                         <a:ea typeface="Calibri" charset="0"/>
                         <a:cs typeface="Calibri" charset="0"/>
@@ -7850,7 +7850,7 @@
                         <a:buNone/>
                       </a:pPr>
                       <a:r>
-                        <a:rPr lang="en-US" sz="1600" dirty="0">
+                        <a:rPr lang="en-US" sz="1400" dirty="0">
                           <a:solidFill>
                             <a:srgbClr val="1B1B1F"/>
                           </a:solidFill>
@@ -7861,7 +7861,7 @@
                         <a:t>Material: Positionen ab </a:t>
                       </a:r>
                       <a:r>
-                        <a:rPr lang="en-US" sz="1600" b="1" dirty="0">
+                        <a:rPr lang="en-US" sz="1400" b="1" dirty="0">
                           <a:solidFill>
                             <a:srgbClr val="1B1B1F"/>
                           </a:solidFill>
@@ -7872,7 +7872,7 @@
                         <a:t>0</a:t>
                       </a:r>
                       <a:r>
-                        <a:rPr lang="en-US" sz="1600" dirty="0">
+                        <a:rPr lang="en-US" sz="1400" dirty="0">
                           <a:solidFill>
                             <a:srgbClr val="1B1B1F"/>
                           </a:solidFill>
@@ -7882,7 +7882,7 @@
                         </a:rPr>
                         <a:t>, A = 1</a:t>
                       </a:r>
-                      <a:endParaRPr lang="en-US" sz="1600" dirty="0">
+                      <a:endParaRPr lang="en-US" sz="1400" dirty="0">
                         <a:latin typeface="Calibri" charset="0"/>
                         <a:ea typeface="Calibri" charset="0"/>
                         <a:cs typeface="Calibri" charset="0"/>
@@ -7942,7 +7942,7 @@
                         <a:buNone/>
                       </a:pPr>
                       <a:r>
-                        <a:rPr lang="en-US" sz="1600" dirty="0">
+                        <a:rPr lang="en-US" sz="1400" dirty="0">
                           <a:solidFill>
                             <a:srgbClr val="1B1B1F"/>
                           </a:solidFill>
@@ -7952,7 +7952,7 @@
                         </a:rPr>
                         <a:t>P2 Modulo</a:t>
                       </a:r>
-                      <a:endParaRPr lang="en-US" sz="1600" dirty="0">
+                      <a:endParaRPr lang="en-US" sz="1400" dirty="0">
                         <a:latin typeface="Calibri" charset="0"/>
                         <a:ea typeface="Calibri" charset="0"/>
                         <a:cs typeface="Calibri" charset="0"/>
@@ -8010,7 +8010,7 @@
                         <a:buNone/>
                       </a:pPr>
                       <a:r>
-                        <a:rPr lang="en-US" sz="1600" dirty="0">
+                        <a:rPr lang="en-US" sz="1400" dirty="0">
                           <a:solidFill>
                             <a:srgbClr val="1B1B1F"/>
                           </a:solidFill>
@@ -8020,7 +8020,7 @@
                         </a:rPr>
                         <a:t>T + 11 = 31 → „kein Buchstabe“</a:t>
                       </a:r>
-                      <a:endParaRPr lang="en-US" sz="1600" dirty="0">
+                      <a:endParaRPr lang="en-US" sz="1400" dirty="0">
                         <a:latin typeface="Calibri" charset="0"/>
                         <a:ea typeface="Calibri" charset="0"/>
                         <a:cs typeface="Calibri" charset="0"/>
@@ -8078,7 +8078,7 @@
                         <a:buNone/>
                       </a:pPr>
                       <a:r>
-                        <a:rPr lang="en-US" sz="1600" dirty="0">
+                        <a:rPr lang="en-US" sz="1400" dirty="0">
                           <a:solidFill>
                             <a:srgbClr val="1B1B1F"/>
                           </a:solidFill>
@@ -8088,7 +8088,7 @@
                         </a:rPr>
                         <a:t>31 − 26 = 5 → E; Rest 0 → Z</a:t>
                       </a:r>
-                      <a:endParaRPr lang="en-US" sz="1600" dirty="0">
+                      <a:endParaRPr lang="en-US" sz="1400" dirty="0">
                         <a:latin typeface="Calibri" charset="0"/>
                         <a:ea typeface="Calibri" charset="0"/>
                         <a:cs typeface="Calibri" charset="0"/>
@@ -8148,7 +8148,7 @@
                         <a:buNone/>
                       </a:pPr>
                       <a:r>
-                        <a:rPr lang="en-US" sz="1600" dirty="0">
+                        <a:rPr lang="en-US" sz="1400" dirty="0">
                           <a:solidFill>
                             <a:srgbClr val="1B1B1F"/>
                           </a:solidFill>
@@ -8158,7 +8158,7 @@
                         </a:rPr>
                         <a:t>P3 Umkehrung</a:t>
                       </a:r>
-                      <a:endParaRPr lang="en-US" sz="1600" dirty="0">
+                      <a:endParaRPr lang="en-US" sz="1400" dirty="0">
                         <a:latin typeface="Calibri" charset="0"/>
                         <a:ea typeface="Calibri" charset="0"/>
                         <a:cs typeface="Calibri" charset="0"/>
@@ -8216,7 +8216,7 @@
                         <a:buNone/>
                       </a:pPr>
                       <a:r>
-                        <a:rPr lang="en-US" sz="1600" dirty="0">
+                        <a:rPr lang="en-US" sz="1400" dirty="0">
                           <a:solidFill>
                             <a:srgbClr val="1B1B1F"/>
                           </a:solidFill>
@@ -8226,7 +8226,7 @@
                         </a:rPr>
                         <a:t>erst Blockwende zurück</a:t>
                       </a:r>
-                      <a:endParaRPr lang="en-US" sz="1600" dirty="0">
+                      <a:endParaRPr lang="en-US" sz="1400" dirty="0">
                         <a:latin typeface="Calibri" charset="0"/>
                         <a:ea typeface="Calibri" charset="0"/>
                         <a:cs typeface="Calibri" charset="0"/>
@@ -8284,7 +8284,7 @@
                         <a:buNone/>
                       </a:pPr>
                       <a:r>
-                        <a:rPr lang="en-US" sz="1600" dirty="0">
+                        <a:rPr lang="en-US" sz="1400" dirty="0">
                           <a:solidFill>
                             <a:srgbClr val="1B1B1F"/>
                           </a:solidFill>
@@ -8294,7 +8294,7 @@
                         </a:rPr>
                         <a:t>letzte Stufe zuerst umkehren</a:t>
                       </a:r>
-                      <a:endParaRPr lang="en-US" sz="1600" dirty="0">
+                      <a:endParaRPr lang="en-US" sz="1400" dirty="0">
                         <a:latin typeface="Calibri" charset="0"/>
                         <a:ea typeface="Calibri" charset="0"/>
                         <a:cs typeface="Calibri" charset="0"/>
@@ -8354,7 +8354,7 @@
                         <a:buNone/>
                       </a:pPr>
                       <a:r>
-                        <a:rPr lang="en-US" sz="1600" dirty="0">
+                        <a:rPr lang="en-US" sz="1400" dirty="0">
                           <a:solidFill>
                             <a:srgbClr val="1B1B1F"/>
                           </a:solidFill>
@@ -8364,7 +8364,7 @@
                         </a:rPr>
                         <a:t>P4 Regel übersehen</a:t>
                       </a:r>
-                      <a:endParaRPr lang="en-US" sz="1600" dirty="0">
+                      <a:endParaRPr lang="en-US" sz="1400" dirty="0">
                         <a:latin typeface="Calibri" charset="0"/>
                         <a:ea typeface="Calibri" charset="0"/>
                         <a:cs typeface="Calibri" charset="0"/>
@@ -8422,7 +8422,7 @@
                         <a:buNone/>
                       </a:pPr>
                       <a:r>
-                        <a:rPr lang="en-US" sz="1600" dirty="0">
+                        <a:rPr lang="en-US" sz="1400" dirty="0">
                           <a:solidFill>
                             <a:srgbClr val="1B1B1F"/>
                           </a:solidFill>
@@ -8432,7 +8432,7 @@
                         </a:rPr>
                         <a:t>X vergessen → LNEYP LJEVP X</a:t>
                       </a:r>
-                      <a:endParaRPr lang="en-US" sz="1600" dirty="0">
+                      <a:endParaRPr lang="en-US" sz="1400" dirty="0">
                         <a:latin typeface="Calibri" charset="0"/>
                         <a:ea typeface="Calibri" charset="0"/>
                         <a:cs typeface="Calibri" charset="0"/>
@@ -8490,7 +8490,7 @@
                         <a:buNone/>
                       </a:pPr>
                       <a:r>
-                        <a:rPr lang="en-US" sz="1600" dirty="0">
+                        <a:rPr lang="en-US" sz="1400" dirty="0">
                           <a:solidFill>
                             <a:srgbClr val="1B1B1F"/>
                           </a:solidFill>
@@ -8500,7 +8500,7 @@
                         </a:rPr>
                         <a:t>auffüllen → LNEYP LJEBC IE</a:t>
                       </a:r>
-                      <a:endParaRPr lang="en-US" sz="1600" dirty="0">
+                      <a:endParaRPr lang="en-US" sz="1400" dirty="0">
                         <a:latin typeface="Calibri" charset="0"/>
                         <a:ea typeface="Calibri" charset="0"/>
                         <a:cs typeface="Calibri" charset="0"/>
@@ -8560,7 +8560,7 @@
                         <a:buNone/>
                       </a:pPr>
                       <a:r>
-                        <a:rPr lang="en-US" sz="1600" dirty="0">
+                        <a:rPr lang="en-US" sz="1400" dirty="0">
                           <a:solidFill>
                             <a:srgbClr val="1B1B1F"/>
                           </a:solidFill>
@@ -8570,7 +8570,7 @@
                         </a:rPr>
                         <a:t>P5 Einordnung</a:t>
                       </a:r>
-                      <a:endParaRPr lang="en-US" sz="1600" dirty="0">
+                      <a:endParaRPr lang="en-US" sz="1400" dirty="0">
                         <a:latin typeface="Calibri" charset="0"/>
                         <a:ea typeface="Calibri" charset="0"/>
                         <a:cs typeface="Calibri" charset="0"/>
@@ -8628,7 +8628,7 @@
                         <a:buNone/>
                       </a:pPr>
                       <a:r>
-                        <a:rPr lang="en-US" sz="1600" dirty="0">
+                        <a:rPr lang="en-US" sz="1400" dirty="0">
                           <a:solidFill>
                             <a:srgbClr val="1B1B1F"/>
                           </a:solidFill>
@@ -8638,7 +8638,7 @@
                         </a:rPr>
                         <a:t>„poly, weil zwei Stufen“</a:t>
                       </a:r>
-                      <a:endParaRPr lang="en-US" sz="1600" dirty="0">
+                      <a:endParaRPr lang="en-US" sz="1400" dirty="0">
                         <a:latin typeface="Calibri" charset="0"/>
                         <a:ea typeface="Calibri" charset="0"/>
                         <a:cs typeface="Calibri" charset="0"/>
@@ -8696,7 +8696,7 @@
                         <a:buNone/>
                       </a:pPr>
                       <a:r>
-                        <a:rPr lang="en-US" sz="1600" dirty="0">
+                        <a:rPr lang="en-US" sz="1400" dirty="0">
                           <a:solidFill>
                             <a:srgbClr val="1B1B1F"/>
                           </a:solidFill>
@@ -8706,7 +8706,7 @@
                         </a:rPr>
                         <a:t>Kriterium: gleicher Buchstabe immer gleich ersetzt?</a:t>
                       </a:r>
-                      <a:endParaRPr lang="en-US" sz="1600" dirty="0">
+                      <a:endParaRPr lang="en-US" sz="1400" dirty="0">
                         <a:latin typeface="Calibri" charset="0"/>
                         <a:ea typeface="Calibri" charset="0"/>
                         <a:cs typeface="Calibri" charset="0"/>
@@ -8908,7 +8908,7 @@
                         <a:buNone/>
                       </a:pPr>
                       <a:r>
-                        <a:rPr lang="en-US" sz="1600" b="1" dirty="0">
+                        <a:rPr lang="en-US" sz="1400" b="1" dirty="0">
                           <a:solidFill>
                             <a:srgbClr val="1B1B1F"/>
                           </a:solidFill>
@@ -8918,7 +8918,7 @@
                         </a:rPr>
                         <a:t>Falle</a:t>
                       </a:r>
-                      <a:endParaRPr lang="en-US" sz="1600" dirty="0">
+                      <a:endParaRPr lang="en-US" sz="1400" dirty="0">
                         <a:latin typeface="Calibri" charset="0"/>
                         <a:ea typeface="Calibri" charset="0"/>
                         <a:cs typeface="Calibri" charset="0"/>
@@ -8976,7 +8976,7 @@
                         <a:buNone/>
                       </a:pPr>
                       <a:r>
-                        <a:rPr lang="en-US" sz="1600" b="1" dirty="0">
+                        <a:rPr lang="en-US" sz="1400" b="1" dirty="0">
                           <a:solidFill>
                             <a:srgbClr val="1B1B1F"/>
                           </a:solidFill>
@@ -8986,7 +8986,7 @@
                         </a:rPr>
                         <a:t>✗ so nicht</a:t>
                       </a:r>
-                      <a:endParaRPr lang="en-US" sz="1600" dirty="0">
+                      <a:endParaRPr lang="en-US" sz="1400" dirty="0">
                         <a:latin typeface="Calibri" charset="0"/>
                         <a:ea typeface="Calibri" charset="0"/>
                         <a:cs typeface="Calibri" charset="0"/>
@@ -9044,7 +9044,7 @@
                         <a:buNone/>
                       </a:pPr>
                       <a:r>
-                        <a:rPr lang="en-US" sz="1600" b="1" dirty="0">
+                        <a:rPr lang="en-US" sz="1400" b="1" dirty="0">
                           <a:solidFill>
                             <a:srgbClr val="1B1B1F"/>
                           </a:solidFill>
@@ -9054,7 +9054,7 @@
                         </a:rPr>
                         <a:t>✓ so geht’s</a:t>
                       </a:r>
-                      <a:endParaRPr lang="en-US" sz="1600" dirty="0">
+                      <a:endParaRPr lang="en-US" sz="1400" dirty="0">
                         <a:latin typeface="Calibri" charset="0"/>
                         <a:ea typeface="Calibri" charset="0"/>
                         <a:cs typeface="Calibri" charset="0"/>
@@ -9114,7 +9114,7 @@
                         <a:buNone/>
                       </a:pPr>
                       <a:r>
-                        <a:rPr lang="en-US" sz="1600" dirty="0">
+                        <a:rPr lang="en-US" sz="1400" dirty="0">
                           <a:solidFill>
                             <a:srgbClr val="1B1B1F"/>
                           </a:solidFill>
@@ -9124,7 +9124,7 @@
                         </a:rPr>
                         <a:t>P6 Häufigkeitsanalyse</a:t>
                       </a:r>
-                      <a:endParaRPr lang="en-US" sz="1600" dirty="0">
+                      <a:endParaRPr lang="en-US" sz="1400" dirty="0">
                         <a:latin typeface="Calibri" charset="0"/>
                         <a:ea typeface="Calibri" charset="0"/>
                         <a:cs typeface="Calibri" charset="0"/>
@@ -9182,7 +9182,7 @@
                         <a:buNone/>
                       </a:pPr>
                       <a:r>
-                        <a:rPr lang="en-US" sz="1600" dirty="0">
+                        <a:rPr lang="en-US" sz="1400" dirty="0">
                           <a:solidFill>
                             <a:srgbClr val="1B1B1F"/>
                           </a:solidFill>
@@ -9192,7 +9192,7 @@
                         </a:rPr>
                         <a:t>„geht nicht, weil poly“</a:t>
                       </a:r>
-                      <a:endParaRPr lang="en-US" sz="1600" dirty="0">
+                      <a:endParaRPr lang="en-US" sz="1400" dirty="0">
                         <a:latin typeface="Calibri" charset="0"/>
                         <a:ea typeface="Calibri" charset="0"/>
                         <a:cs typeface="Calibri" charset="0"/>
@@ -9250,7 +9250,7 @@
                         <a:buNone/>
                       </a:pPr>
                       <a:r>
-                        <a:rPr lang="en-US" sz="1600" dirty="0">
+                        <a:rPr lang="en-US" sz="1400" dirty="0">
                           <a:solidFill>
                             <a:srgbClr val="1B1B1F"/>
                           </a:solidFill>
@@ -9260,7 +9260,7 @@
                         </a:rPr>
                         <a:t>2 Teiltexte, je eine Häufigkeitsanalyse; langer Text nötig</a:t>
                       </a:r>
-                      <a:endParaRPr lang="en-US" sz="1600" dirty="0">
+                      <a:endParaRPr lang="en-US" sz="1400" dirty="0">
                         <a:latin typeface="Calibri" charset="0"/>
                         <a:ea typeface="Calibri" charset="0"/>
                         <a:cs typeface="Calibri" charset="0"/>
@@ -9320,7 +9320,7 @@
                         <a:buNone/>
                       </a:pPr>
                       <a:r>
-                        <a:rPr lang="en-US" sz="1600" dirty="0">
+                        <a:rPr lang="en-US" sz="1400" dirty="0">
                           <a:solidFill>
                             <a:srgbClr val="1B1B1F"/>
                           </a:solidFill>
@@ -9330,7 +9330,7 @@
                         </a:rPr>
                         <a:t>P7 Schlüsselraum</a:t>
                       </a:r>
-                      <a:endParaRPr lang="en-US" sz="1600" dirty="0">
+                      <a:endParaRPr lang="en-US" sz="1400" dirty="0">
                         <a:latin typeface="Calibri" charset="0"/>
                         <a:ea typeface="Calibri" charset="0"/>
                         <a:cs typeface="Calibri" charset="0"/>
@@ -9388,7 +9388,7 @@
                         <a:buNone/>
                       </a:pPr>
                       <a:r>
-                        <a:rPr lang="en-US" sz="1600" dirty="0">
+                        <a:rPr lang="en-US" sz="1400" dirty="0">
                           <a:solidFill>
                             <a:srgbClr val="1B1B1F"/>
                           </a:solidFill>
@@ -9398,7 +9398,7 @@
                         </a:rPr>
                         <a:t>26 + 26 = 52</a:t>
                       </a:r>
-                      <a:endParaRPr lang="en-US" sz="1600" dirty="0">
+                      <a:endParaRPr lang="en-US" sz="1400" dirty="0">
                         <a:latin typeface="Calibri" charset="0"/>
                         <a:ea typeface="Calibri" charset="0"/>
                         <a:cs typeface="Calibri" charset="0"/>
@@ -9456,7 +9456,7 @@
                         <a:buNone/>
                       </a:pPr>
                       <a:r>
-                        <a:rPr lang="en-US" sz="1600" dirty="0">
+                        <a:rPr lang="en-US" sz="1400" dirty="0">
                           <a:solidFill>
                             <a:srgbClr val="1B1B1F"/>
                           </a:solidFill>
@@ -9466,7 +9466,7 @@
                         </a:rPr>
                         <a:t>26 · 26 = 676; davon 26 schwach (s = t)</a:t>
                       </a:r>
-                      <a:endParaRPr lang="en-US" sz="1600" dirty="0">
+                      <a:endParaRPr lang="en-US" sz="1400" dirty="0">
                         <a:latin typeface="Calibri" charset="0"/>
                         <a:ea typeface="Calibri" charset="0"/>
                         <a:cs typeface="Calibri" charset="0"/>
@@ -9526,7 +9526,7 @@
                         <a:buNone/>
                       </a:pPr>
                       <a:r>
-                        <a:rPr lang="en-US" sz="1600" dirty="0">
+                        <a:rPr lang="en-US" sz="1400" dirty="0">
                           <a:solidFill>
                             <a:srgbClr val="1B1B1F"/>
                           </a:solidFill>
@@ -9536,7 +9536,7 @@
                         </a:rPr>
                         <a:t>P8 Kombination</a:t>
                       </a:r>
-                      <a:endParaRPr lang="en-US" sz="1600" dirty="0">
+                      <a:endParaRPr lang="en-US" sz="1400" dirty="0">
                         <a:latin typeface="Calibri" charset="0"/>
                         <a:ea typeface="Calibri" charset="0"/>
                         <a:cs typeface="Calibri" charset="0"/>
@@ -9594,7 +9594,7 @@
                         <a:buNone/>
                       </a:pPr>
                       <a:r>
-                        <a:rPr lang="en-US" sz="1600" dirty="0">
+                        <a:rPr lang="en-US" sz="1400" dirty="0">
                           <a:solidFill>
                             <a:srgbClr val="1B1B1F"/>
                           </a:solidFill>
@@ -9604,7 +9604,7 @@
                         </a:rPr>
                         <a:t>„zweimal = doppelt sicher“</a:t>
                       </a:r>
-                      <a:endParaRPr lang="en-US" sz="1600" dirty="0">
+                      <a:endParaRPr lang="en-US" sz="1400" dirty="0">
                         <a:latin typeface="Calibri" charset="0"/>
                         <a:ea typeface="Calibri" charset="0"/>
                         <a:cs typeface="Calibri" charset="0"/>
@@ -9662,7 +9662,7 @@
                         <a:buNone/>
                       </a:pPr>
                       <a:r>
-                        <a:rPr lang="en-US" sz="1600" dirty="0">
+                        <a:rPr lang="en-US" sz="1400" dirty="0">
                           <a:solidFill>
                             <a:srgbClr val="1B1B1F"/>
                           </a:solidFill>
@@ -9672,7 +9672,7 @@
                         </a:rPr>
                         <a:t>zweimal = Caesar mit s + t</a:t>
                       </a:r>
-                      <a:endParaRPr lang="en-US" sz="1600" dirty="0">
+                      <a:endParaRPr lang="en-US" sz="1400" dirty="0">
                         <a:latin typeface="Calibri" charset="0"/>
                         <a:ea typeface="Calibri" charset="0"/>
                         <a:cs typeface="Calibri" charset="0"/>
@@ -9732,7 +9732,7 @@
                         <a:buNone/>
                       </a:pPr>
                       <a:r>
-                        <a:rPr lang="en-US" sz="1600" dirty="0">
+                        <a:rPr lang="en-US" sz="1400" dirty="0">
                           <a:solidFill>
                             <a:srgbClr val="1B1B1F"/>
                           </a:solidFill>
@@ -9742,7 +9742,7 @@
                         </a:rPr>
                         <a:t>P9 Schlüsselrollen</a:t>
                       </a:r>
-                      <a:endParaRPr lang="en-US" sz="1600" dirty="0">
+                      <a:endParaRPr lang="en-US" sz="1400" dirty="0">
                         <a:latin typeface="Calibri" charset="0"/>
                         <a:ea typeface="Calibri" charset="0"/>
                         <a:cs typeface="Calibri" charset="0"/>
@@ -9800,7 +9800,7 @@
                         <a:buNone/>
                       </a:pPr>
                       <a:r>
-                        <a:rPr lang="en-US" sz="1600" dirty="0">
+                        <a:rPr lang="en-US" sz="1400" dirty="0">
                           <a:solidFill>
                             <a:srgbClr val="1B1B1F"/>
                           </a:solidFill>
@@ -9810,7 +9810,7 @@
                         </a:rPr>
                         <a:t>signieren mit Bobs öffentlichem</a:t>
                       </a:r>
-                      <a:endParaRPr lang="en-US" sz="1600" dirty="0">
+                      <a:endParaRPr lang="en-US" sz="1400" dirty="0">
                         <a:latin typeface="Calibri" charset="0"/>
                         <a:ea typeface="Calibri" charset="0"/>
                         <a:cs typeface="Calibri" charset="0"/>
@@ -9868,7 +9868,7 @@
                         <a:buNone/>
                       </a:pPr>
                       <a:r>
-                        <a:rPr lang="en-US" sz="1600" dirty="0">
+                        <a:rPr lang="en-US" sz="1400" dirty="0">
                           <a:solidFill>
                             <a:srgbClr val="1B1B1F"/>
                           </a:solidFill>
@@ -9879,7 +9879,7 @@
                         <a:t>mit dem </a:t>
                       </a:r>
                       <a:r>
-                        <a:rPr lang="en-US" sz="1600" b="1" dirty="0">
+                        <a:rPr lang="en-US" sz="1400" b="1" dirty="0">
                           <a:solidFill>
                             <a:srgbClr val="1B1B1F"/>
                           </a:solidFill>
@@ -9890,7 +9890,7 @@
                         <a:t>privaten</a:t>
                       </a:r>
                       <a:r>
-                        <a:rPr lang="en-US" sz="1600" dirty="0">
+                        <a:rPr lang="en-US" sz="1400" dirty="0">
                           <a:solidFill>
                             <a:srgbClr val="1B1B1F"/>
                           </a:solidFill>
@@ -9900,7 +9900,7 @@
                         </a:rPr>
                         <a:t> Schlüssel des Absenders</a:t>
                       </a:r>
-                      <a:endParaRPr lang="en-US" sz="1600" dirty="0">
+                      <a:endParaRPr lang="en-US" sz="1400" dirty="0">
                         <a:latin typeface="Calibri" charset="0"/>
                         <a:ea typeface="Calibri" charset="0"/>
                         <a:cs typeface="Calibri" charset="0"/>
@@ -9960,7 +9960,7 @@
                         <a:buNone/>
                       </a:pPr>
                       <a:r>
-                        <a:rPr lang="en-US" sz="1600" dirty="0">
+                        <a:rPr lang="en-US" sz="1400" dirty="0">
                           <a:solidFill>
                             <a:srgbClr val="1B1B1F"/>
                           </a:solidFill>
@@ -9970,7 +9970,7 @@
                         </a:rPr>
                         <a:t>P10 Operator</a:t>
                       </a:r>
-                      <a:endParaRPr lang="en-US" sz="1600" dirty="0">
+                      <a:endParaRPr lang="en-US" sz="1400" dirty="0">
                         <a:latin typeface="Calibri" charset="0"/>
                         <a:ea typeface="Calibri" charset="0"/>
                         <a:cs typeface="Calibri" charset="0"/>
@@ -10028,7 +10028,7 @@
                         <a:buNone/>
                       </a:pPr>
                       <a:r>
-                        <a:rPr lang="en-US" sz="1600" dirty="0">
+                        <a:rPr lang="en-US" sz="1400" dirty="0">
                           <a:solidFill>
                             <a:srgbClr val="1B1B1F"/>
                           </a:solidFill>
@@ -10038,7 +10038,7 @@
                         </a:rPr>
                         <a:t>„Unsicher.“</a:t>
                       </a:r>
-                      <a:endParaRPr lang="en-US" sz="1600" dirty="0">
+                      <a:endParaRPr lang="en-US" sz="1400" dirty="0">
                         <a:latin typeface="Calibri" charset="0"/>
                         <a:ea typeface="Calibri" charset="0"/>
                         <a:cs typeface="Calibri" charset="0"/>
@@ -10096,7 +10096,7 @@
                         <a:buNone/>
                       </a:pPr>
                       <a:r>
-                        <a:rPr lang="en-US" sz="1600" dirty="0">
+                        <a:rPr lang="en-US" sz="1400" dirty="0">
                           <a:solidFill>
                             <a:srgbClr val="1B1B1F"/>
                           </a:solidFill>
@@ -10106,7 +10106,7 @@
                         </a:rPr>
                         <a:t>Kriterium → Begründung → Urteil</a:t>
                       </a:r>
-                      <a:endParaRPr lang="en-US" sz="1600" dirty="0">
+                      <a:endParaRPr lang="en-US" sz="1400" dirty="0">
                         <a:latin typeface="Calibri" charset="0"/>
                         <a:ea typeface="Calibri" charset="0"/>
                         <a:cs typeface="Calibri" charset="0"/>
@@ -10649,11 +10649,11 @@
         <p:spPr>
           <a:xfrm>
             <a:off x="1097280" y="1508760"/>
-            <a:ext cx="9997135" cy="3977640"/>
+            <a:ext cx="6217920" cy="4663440"/>
           </a:xfrm>
           <a:prstGeom prst="roundRect">
             <a:avLst>
-              <a:gd name="adj" fmla="val 2299"/>
+              <a:gd name="adj" fmla="val 1961"/>
             </a:avLst>
           </a:prstGeom>
           <a:solidFill>
@@ -10715,7 +10715,7 @@
         <p:spPr>
           <a:xfrm>
             <a:off x="1508760" y="2240280"/>
-            <a:ext cx="9174175" cy="727456"/>
+            <a:ext cx="5394960" cy="665480"/>
           </a:xfrm>
           <a:prstGeom prst="rect">
             <a:avLst/>
@@ -10731,7 +10731,7 @@
               <a:buNone/>
             </a:pPr>
             <a:r>
-              <a:rPr lang="en-US" sz="2200" dirty="0">
+              <a:rPr lang="en-US" sz="2000" dirty="0">
                 <a:solidFill>
                   <a:srgbClr val="1B1B1F"/>
                 </a:solidFill>
@@ -10739,14 +10739,14 @@
               <a:t>5 Schritte: </a:t>
             </a:r>
             <a:r>
-              <a:rPr lang="en-US" sz="2200" b="1" dirty="0">
+              <a:rPr lang="en-US" sz="2000" b="1" dirty="0">
                 <a:solidFill>
                   <a:srgbClr val="1B1B1F"/>
                 </a:solidFill>
               </a:rPr>
               <a:t>nachrechnen – anwenden – umkehren – einordnen – beurteilen</a:t>
             </a:r>
-            <a:endParaRPr lang="en-US" sz="2200" dirty="0"/>
+            <a:endParaRPr lang="en-US" sz="2000" dirty="0"/>
           </a:p>
         </p:txBody>
       </p:sp>
@@ -10758,8 +10758,8 @@
         </p:nvSpPr>
         <p:spPr>
           <a:xfrm>
-            <a:off x="1508760" y="3095752"/>
-            <a:ext cx="9174175" cy="386588"/>
+            <a:off x="1508760" y="3033776"/>
+            <a:ext cx="5394960" cy="665480"/>
           </a:xfrm>
           <a:prstGeom prst="rect">
             <a:avLst/>
@@ -10775,7 +10775,7 @@
               <a:buNone/>
             </a:pPr>
             <a:r>
-              <a:rPr lang="en-US" sz="2200" dirty="0">
+              <a:rPr lang="en-US" sz="2000" dirty="0">
                 <a:solidFill>
                   <a:srgbClr val="1B1B1F"/>
                 </a:solidFill>
@@ -10783,14 +10783,14 @@
               <a:t>Umkehren: jede Stufe invertieren, </a:t>
             </a:r>
             <a:r>
-              <a:rPr lang="en-US" sz="2200" b="1" dirty="0">
+              <a:rPr lang="en-US" sz="2000" b="1" dirty="0">
                 <a:solidFill>
                   <a:srgbClr val="1B1B1F"/>
                 </a:solidFill>
               </a:rPr>
               <a:t>letzte zuerst</a:t>
             </a:r>
-            <a:endParaRPr lang="en-US" sz="2200" dirty="0"/>
+            <a:endParaRPr lang="en-US" sz="2000" dirty="0"/>
           </a:p>
         </p:txBody>
       </p:sp>
@@ -10802,8 +10802,8 @@
         </p:nvSpPr>
         <p:spPr>
           <a:xfrm>
-            <a:off x="1508760" y="3610356"/>
-            <a:ext cx="9174175" cy="727456"/>
+            <a:off x="1508760" y="3827272"/>
+            <a:ext cx="5394960" cy="975360"/>
           </a:xfrm>
           <a:prstGeom prst="rect">
             <a:avLst/>
@@ -10819,14 +10819,14 @@
               <a:buNone/>
             </a:pPr>
             <a:r>
-              <a:rPr lang="en-US" sz="2200" dirty="0">
+              <a:rPr lang="en-US" sz="2000" dirty="0">
                 <a:solidFill>
                   <a:srgbClr val="1B1B1F"/>
                 </a:solidFill>
               </a:rPr>
               <a:t>Einordnen je Stufe; Kriterium für mono/poly: gleicher Buchstabe immer gleich ersetzt?</a:t>
             </a:r>
-            <a:endParaRPr lang="en-US" sz="2200" dirty="0"/>
+            <a:endParaRPr lang="en-US" sz="2000" dirty="0"/>
           </a:p>
         </p:txBody>
       </p:sp>
@@ -10838,8 +10838,8 @@
         </p:nvSpPr>
         <p:spPr>
           <a:xfrm>
-            <a:off x="1508760" y="4465828"/>
-            <a:ext cx="9174175" cy="386588"/>
+            <a:off x="1508760" y="4930648"/>
+            <a:ext cx="5394960" cy="665480"/>
           </a:xfrm>
           <a:prstGeom prst="rect">
             <a:avLst/>
@@ -10855,7 +10855,7 @@
               <a:buNone/>
             </a:pPr>
             <a:r>
-              <a:rPr lang="en-US" sz="2200" dirty="0">
+              <a:rPr lang="en-US" sz="2000" dirty="0">
                 <a:solidFill>
                   <a:srgbClr val="1B1B1F"/>
                 </a:solidFill>
@@ -10863,14 +10863,14 @@
               <a:t>Beurteilen: Kriterien aus dem Raster → Begründung → </a:t>
             </a:r>
             <a:r>
-              <a:rPr lang="en-US" sz="2200" b="1" dirty="0">
+              <a:rPr lang="en-US" sz="2000" b="1" dirty="0">
                 <a:solidFill>
                   <a:srgbClr val="1B1B1F"/>
                 </a:solidFill>
               </a:rPr>
               <a:t>Urteil</a:t>
             </a:r>
-            <a:endParaRPr lang="en-US" sz="2200" dirty="0"/>
+            <a:endParaRPr lang="en-US" sz="2000" dirty="0"/>
           </a:p>
         </p:txBody>
       </p:sp>
@@ -14219,7 +14219,7 @@
                         <a:buNone/>
                       </a:pPr>
                       <a:r>
-                        <a:rPr lang="en-US" sz="1300" b="1" dirty="0">
+                        <a:rPr lang="en-US" sz="1600" b="1" dirty="0">
                           <a:solidFill>
                             <a:srgbClr val="1B1B1F"/>
                           </a:solidFill>
@@ -14229,7 +14229,7 @@
                         </a:rPr>
                         <a:t>Pos.</a:t>
                       </a:r>
-                      <a:endParaRPr lang="en-US" sz="1300" dirty="0">
+                      <a:endParaRPr lang="en-US" sz="1600" dirty="0">
                         <a:latin typeface="Calibri" charset="0"/>
                         <a:ea typeface="Calibri" charset="0"/>
                         <a:cs typeface="Calibri" charset="0"/>
@@ -14287,7 +14287,7 @@
                         <a:buNone/>
                       </a:pPr>
                       <a:r>
-                        <a:rPr lang="en-US" sz="1300" b="1" dirty="0">
+                        <a:rPr lang="en-US" sz="1600" b="1" dirty="0">
                           <a:solidFill>
                             <a:srgbClr val="1B1B1F"/>
                           </a:solidFill>
@@ -14297,7 +14297,7 @@
                         </a:rPr>
                         <a:t>0</a:t>
                       </a:r>
-                      <a:endParaRPr lang="en-US" sz="1300" dirty="0">
+                      <a:endParaRPr lang="en-US" sz="1600" dirty="0">
                         <a:latin typeface="Calibri" charset="0"/>
                         <a:ea typeface="Calibri" charset="0"/>
                         <a:cs typeface="Calibri" charset="0"/>
@@ -14355,7 +14355,7 @@
                         <a:buNone/>
                       </a:pPr>
                       <a:r>
-                        <a:rPr lang="en-US" sz="1300" b="1" dirty="0">
+                        <a:rPr lang="en-US" sz="1600" b="1" dirty="0">
                           <a:solidFill>
                             <a:srgbClr val="1B1B1F"/>
                           </a:solidFill>
@@ -14365,7 +14365,7 @@
                         </a:rPr>
                         <a:t>1</a:t>
                       </a:r>
-                      <a:endParaRPr lang="en-US" sz="1300" dirty="0">
+                      <a:endParaRPr lang="en-US" sz="1600" dirty="0">
                         <a:latin typeface="Calibri" charset="0"/>
                         <a:ea typeface="Calibri" charset="0"/>
                         <a:cs typeface="Calibri" charset="0"/>
@@ -14423,7 +14423,7 @@
                         <a:buNone/>
                       </a:pPr>
                       <a:r>
-                        <a:rPr lang="en-US" sz="1300" b="1" dirty="0">
+                        <a:rPr lang="en-US" sz="1600" b="1" dirty="0">
                           <a:solidFill>
                             <a:srgbClr val="1B1B1F"/>
                           </a:solidFill>
@@ -14433,7 +14433,7 @@
                         </a:rPr>
                         <a:t>2</a:t>
                       </a:r>
-                      <a:endParaRPr lang="en-US" sz="1300" dirty="0">
+                      <a:endParaRPr lang="en-US" sz="1600" dirty="0">
                         <a:latin typeface="Calibri" charset="0"/>
                         <a:ea typeface="Calibri" charset="0"/>
                         <a:cs typeface="Calibri" charset="0"/>
@@ -14491,7 +14491,7 @@
                         <a:buNone/>
                       </a:pPr>
                       <a:r>
-                        <a:rPr lang="en-US" sz="1300" b="1" dirty="0">
+                        <a:rPr lang="en-US" sz="1600" b="1" dirty="0">
                           <a:solidFill>
                             <a:srgbClr val="1B1B1F"/>
                           </a:solidFill>
@@ -14501,7 +14501,7 @@
                         </a:rPr>
                         <a:t>3</a:t>
                       </a:r>
-                      <a:endParaRPr lang="en-US" sz="1300" dirty="0">
+                      <a:endParaRPr lang="en-US" sz="1600" dirty="0">
                         <a:latin typeface="Calibri" charset="0"/>
                         <a:ea typeface="Calibri" charset="0"/>
                         <a:cs typeface="Calibri" charset="0"/>
@@ -14559,7 +14559,7 @@
                         <a:buNone/>
                       </a:pPr>
                       <a:r>
-                        <a:rPr lang="en-US" sz="1300" b="1" dirty="0">
+                        <a:rPr lang="en-US" sz="1600" b="1" dirty="0">
                           <a:solidFill>
                             <a:srgbClr val="1B1B1F"/>
                           </a:solidFill>
@@ -14569,7 +14569,7 @@
                         </a:rPr>
                         <a:t>4</a:t>
                       </a:r>
-                      <a:endParaRPr lang="en-US" sz="1300" dirty="0">
+                      <a:endParaRPr lang="en-US" sz="1600" dirty="0">
                         <a:latin typeface="Calibri" charset="0"/>
                         <a:ea typeface="Calibri" charset="0"/>
                         <a:cs typeface="Calibri" charset="0"/>
@@ -14627,7 +14627,7 @@
                         <a:buNone/>
                       </a:pPr>
                       <a:r>
-                        <a:rPr lang="en-US" sz="1300" b="1" dirty="0">
+                        <a:rPr lang="en-US" sz="1600" b="1" dirty="0">
                           <a:solidFill>
                             <a:srgbClr val="1B1B1F"/>
                           </a:solidFill>
@@ -14637,7 +14637,7 @@
                         </a:rPr>
                         <a:t>5</a:t>
                       </a:r>
-                      <a:endParaRPr lang="en-US" sz="1300" dirty="0">
+                      <a:endParaRPr lang="en-US" sz="1600" dirty="0">
                         <a:latin typeface="Calibri" charset="0"/>
                         <a:ea typeface="Calibri" charset="0"/>
                         <a:cs typeface="Calibri" charset="0"/>
@@ -14695,7 +14695,7 @@
                         <a:buNone/>
                       </a:pPr>
                       <a:r>
-                        <a:rPr lang="en-US" sz="1300" b="1" dirty="0">
+                        <a:rPr lang="en-US" sz="1600" b="1" dirty="0">
                           <a:solidFill>
                             <a:srgbClr val="1B1B1F"/>
                           </a:solidFill>
@@ -14705,7 +14705,7 @@
                         </a:rPr>
                         <a:t>6</a:t>
                       </a:r>
-                      <a:endParaRPr lang="en-US" sz="1300" dirty="0">
+                      <a:endParaRPr lang="en-US" sz="1600" dirty="0">
                         <a:latin typeface="Calibri" charset="0"/>
                         <a:ea typeface="Calibri" charset="0"/>
                         <a:cs typeface="Calibri" charset="0"/>
@@ -14763,7 +14763,7 @@
                         <a:buNone/>
                       </a:pPr>
                       <a:r>
-                        <a:rPr lang="en-US" sz="1300" b="1" dirty="0">
+                        <a:rPr lang="en-US" sz="1600" b="1" dirty="0">
                           <a:solidFill>
                             <a:srgbClr val="1B1B1F"/>
                           </a:solidFill>
@@ -14773,7 +14773,7 @@
                         </a:rPr>
                         <a:t>7</a:t>
                       </a:r>
-                      <a:endParaRPr lang="en-US" sz="1300" dirty="0">
+                      <a:endParaRPr lang="en-US" sz="1600" dirty="0">
                         <a:latin typeface="Calibri" charset="0"/>
                         <a:ea typeface="Calibri" charset="0"/>
                         <a:cs typeface="Calibri" charset="0"/>
@@ -14831,7 +14831,7 @@
                         <a:buNone/>
                       </a:pPr>
                       <a:r>
-                        <a:rPr lang="en-US" sz="1300" b="1" dirty="0">
+                        <a:rPr lang="en-US" sz="1600" b="1" dirty="0">
                           <a:solidFill>
                             <a:srgbClr val="1B1B1F"/>
                           </a:solidFill>
@@ -14841,7 +14841,7 @@
                         </a:rPr>
                         <a:t>8</a:t>
                       </a:r>
-                      <a:endParaRPr lang="en-US" sz="1300" dirty="0">
+                      <a:endParaRPr lang="en-US" sz="1600" dirty="0">
                         <a:latin typeface="Calibri" charset="0"/>
                         <a:ea typeface="Calibri" charset="0"/>
                         <a:cs typeface="Calibri" charset="0"/>
@@ -14899,7 +14899,7 @@
                         <a:buNone/>
                       </a:pPr>
                       <a:r>
-                        <a:rPr lang="en-US" sz="1300" b="1" dirty="0">
+                        <a:rPr lang="en-US" sz="1600" b="1" dirty="0">
                           <a:solidFill>
                             <a:srgbClr val="1B1B1F"/>
                           </a:solidFill>
@@ -14909,7 +14909,7 @@
                         </a:rPr>
                         <a:t>9</a:t>
                       </a:r>
-                      <a:endParaRPr lang="en-US" sz="1300" dirty="0">
+                      <a:endParaRPr lang="en-US" sz="1600" dirty="0">
                         <a:latin typeface="Calibri" charset="0"/>
                         <a:ea typeface="Calibri" charset="0"/>
                         <a:cs typeface="Calibri" charset="0"/>
@@ -14967,7 +14967,7 @@
                         <a:buNone/>
                       </a:pPr>
                       <a:r>
-                        <a:rPr lang="en-US" sz="1300" b="1" dirty="0">
+                        <a:rPr lang="en-US" sz="1600" b="1" dirty="0">
                           <a:solidFill>
                             <a:srgbClr val="1B1B1F"/>
                           </a:solidFill>
@@ -14977,7 +14977,7 @@
                         </a:rPr>
                         <a:t>10</a:t>
                       </a:r>
-                      <a:endParaRPr lang="en-US" sz="1300" dirty="0">
+                      <a:endParaRPr lang="en-US" sz="1600" dirty="0">
                         <a:latin typeface="Calibri" charset="0"/>
                         <a:ea typeface="Calibri" charset="0"/>
                         <a:cs typeface="Calibri" charset="0"/>
@@ -15035,7 +15035,7 @@
                         <a:buNone/>
                       </a:pPr>
                       <a:r>
-                        <a:rPr lang="en-US" sz="1300" b="1" dirty="0">
+                        <a:rPr lang="en-US" sz="1600" b="1" dirty="0">
                           <a:solidFill>
                             <a:srgbClr val="1B1B1F"/>
                           </a:solidFill>
@@ -15045,7 +15045,7 @@
                         </a:rPr>
                         <a:t>11</a:t>
                       </a:r>
-                      <a:endParaRPr lang="en-US" sz="1300" dirty="0">
+                      <a:endParaRPr lang="en-US" sz="1600" dirty="0">
                         <a:latin typeface="Calibri" charset="0"/>
                         <a:ea typeface="Calibri" charset="0"/>
                         <a:cs typeface="Calibri" charset="0"/>
@@ -15105,7 +15105,7 @@
                         <a:buNone/>
                       </a:pPr>
                       <a:r>
-                        <a:rPr lang="en-US" sz="1300" dirty="0">
+                        <a:rPr lang="en-US" sz="1600" dirty="0">
                           <a:solidFill>
                             <a:srgbClr val="1B1B1F"/>
                           </a:solidFill>
@@ -15115,7 +15115,7 @@
                         </a:rPr>
                         <a:t>Geheimtext</a:t>
                       </a:r>
-                      <a:endParaRPr lang="en-US" sz="1300" dirty="0">
+                      <a:endParaRPr lang="en-US" sz="1600" dirty="0">
                         <a:latin typeface="Calibri" charset="0"/>
                         <a:ea typeface="Calibri" charset="0"/>
                         <a:cs typeface="Calibri" charset="0"/>
@@ -15173,7 +15173,7 @@
                         <a:buNone/>
                       </a:pPr>
                       <a:r>
-                        <a:rPr lang="en-US" sz="1300" dirty="0">
+                        <a:rPr lang="en-US" sz="1600" dirty="0">
                           <a:solidFill>
                             <a:srgbClr val="1B1B1F"/>
                           </a:solidFill>
@@ -15183,7 +15183,7 @@
                         </a:rPr>
                         <a:t>Y</a:t>
                       </a:r>
-                      <a:endParaRPr lang="en-US" sz="1300" dirty="0">
+                      <a:endParaRPr lang="en-US" sz="1600" dirty="0">
                         <a:latin typeface="Calibri" charset="0"/>
                         <a:ea typeface="Calibri" charset="0"/>
                         <a:cs typeface="Calibri" charset="0"/>
@@ -15241,7 +15241,7 @@
                         <a:buNone/>
                       </a:pPr>
                       <a:r>
-                        <a:rPr lang="en-US" sz="1300" dirty="0">
+                        <a:rPr lang="en-US" sz="1600" dirty="0">
                           <a:solidFill>
                             <a:srgbClr val="1B1B1F"/>
                           </a:solidFill>
@@ -15251,7 +15251,7 @@
                         </a:rPr>
                         <a:t>G</a:t>
                       </a:r>
-                      <a:endParaRPr lang="en-US" sz="1300" dirty="0">
+                      <a:endParaRPr lang="en-US" sz="1600" dirty="0">
                         <a:latin typeface="Calibri" charset="0"/>
                         <a:ea typeface="Calibri" charset="0"/>
                         <a:cs typeface="Calibri" charset="0"/>
@@ -15309,7 +15309,7 @@
                         <a:buNone/>
                       </a:pPr>
                       <a:r>
-                        <a:rPr lang="en-US" sz="1300" dirty="0">
+                        <a:rPr lang="en-US" sz="1600" dirty="0">
                           <a:solidFill>
                             <a:srgbClr val="1B1B1F"/>
                           </a:solidFill>
@@ -15319,7 +15319,7 @@
                         </a:rPr>
                         <a:t>A</a:t>
                       </a:r>
-                      <a:endParaRPr lang="en-US" sz="1300" dirty="0">
+                      <a:endParaRPr lang="en-US" sz="1600" dirty="0">
                         <a:latin typeface="Calibri" charset="0"/>
                         <a:ea typeface="Calibri" charset="0"/>
                         <a:cs typeface="Calibri" charset="0"/>
@@ -15377,7 +15377,7 @@
                         <a:buNone/>
                       </a:pPr>
                       <a:r>
-                        <a:rPr lang="en-US" sz="1300" dirty="0">
+                        <a:rPr lang="en-US" sz="1600" dirty="0">
                           <a:solidFill>
                             <a:srgbClr val="1B1B1F"/>
                           </a:solidFill>
@@ -15387,7 +15387,7 @@
                         </a:rPr>
                         <a:t>U</a:t>
                       </a:r>
-                      <a:endParaRPr lang="en-US" sz="1300" dirty="0">
+                      <a:endParaRPr lang="en-US" sz="1600" dirty="0">
                         <a:latin typeface="Calibri" charset="0"/>
                         <a:ea typeface="Calibri" charset="0"/>
                         <a:cs typeface="Calibri" charset="0"/>
@@ -15445,7 +15445,7 @@
                         <a:buNone/>
                       </a:pPr>
                       <a:r>
-                        <a:rPr lang="en-US" sz="1300" dirty="0">
+                        <a:rPr lang="en-US" sz="1600" dirty="0">
                           <a:solidFill>
                             <a:srgbClr val="1B1B1F"/>
                           </a:solidFill>
@@ -15455,7 +15455,7 @@
                         </a:rPr>
                         <a:t>Y</a:t>
                       </a:r>
-                      <a:endParaRPr lang="en-US" sz="1300" dirty="0">
+                      <a:endParaRPr lang="en-US" sz="1600" dirty="0">
                         <a:latin typeface="Calibri" charset="0"/>
                         <a:ea typeface="Calibri" charset="0"/>
                         <a:cs typeface="Calibri" charset="0"/>
@@ -15513,7 +15513,7 @@
                         <a:buNone/>
                       </a:pPr>
                       <a:r>
-                        <a:rPr lang="en-US" sz="1300" dirty="0">
+                        <a:rPr lang="en-US" sz="1600" dirty="0">
                           <a:solidFill>
                             <a:srgbClr val="1B1B1F"/>
                           </a:solidFill>
@@ -15523,7 +15523,7 @@
                         </a:rPr>
                         <a:t>C</a:t>
                       </a:r>
-                      <a:endParaRPr lang="en-US" sz="1300" dirty="0">
+                      <a:endParaRPr lang="en-US" sz="1600" dirty="0">
                         <a:latin typeface="Calibri" charset="0"/>
                         <a:ea typeface="Calibri" charset="0"/>
                         <a:cs typeface="Calibri" charset="0"/>
@@ -15581,7 +15581,7 @@
                         <a:buNone/>
                       </a:pPr>
                       <a:r>
-                        <a:rPr lang="en-US" sz="1300" dirty="0">
+                        <a:rPr lang="en-US" sz="1600" dirty="0">
                           <a:solidFill>
                             <a:srgbClr val="1B1B1F"/>
                           </a:solidFill>
@@ -15591,7 +15591,7 @@
                         </a:rPr>
                         <a:t>D</a:t>
                       </a:r>
-                      <a:endParaRPr lang="en-US" sz="1300" dirty="0">
+                      <a:endParaRPr lang="en-US" sz="1600" dirty="0">
                         <a:latin typeface="Calibri" charset="0"/>
                         <a:ea typeface="Calibri" charset="0"/>
                         <a:cs typeface="Calibri" charset="0"/>
@@ -15649,7 +15649,7 @@
                         <a:buNone/>
                       </a:pPr>
                       <a:r>
-                        <a:rPr lang="en-US" sz="1300" dirty="0">
+                        <a:rPr lang="en-US" sz="1600" dirty="0">
                           <a:solidFill>
                             <a:srgbClr val="1B1B1F"/>
                           </a:solidFill>
@@ -15659,7 +15659,7 @@
                         </a:rPr>
                         <a:t>P</a:t>
                       </a:r>
-                      <a:endParaRPr lang="en-US" sz="1300" dirty="0">
+                      <a:endParaRPr lang="en-US" sz="1600" dirty="0">
                         <a:latin typeface="Calibri" charset="0"/>
                         <a:ea typeface="Calibri" charset="0"/>
                         <a:cs typeface="Calibri" charset="0"/>
@@ -15717,7 +15717,7 @@
                         <a:buNone/>
                       </a:pPr>
                       <a:r>
-                        <a:rPr lang="en-US" sz="1300" dirty="0">
+                        <a:rPr lang="en-US" sz="1600" dirty="0">
                           <a:solidFill>
                             <a:srgbClr val="1B1B1F"/>
                           </a:solidFill>
@@ -15727,7 +15727,7 @@
                         </a:rPr>
                         <a:t>E</a:t>
                       </a:r>
-                      <a:endParaRPr lang="en-US" sz="1300" dirty="0">
+                      <a:endParaRPr lang="en-US" sz="1600" dirty="0">
                         <a:latin typeface="Calibri" charset="0"/>
                         <a:ea typeface="Calibri" charset="0"/>
                         <a:cs typeface="Calibri" charset="0"/>
@@ -15785,7 +15785,7 @@
                         <a:buNone/>
                       </a:pPr>
                       <a:r>
-                        <a:rPr lang="en-US" sz="1300" dirty="0">
+                        <a:rPr lang="en-US" sz="1600" dirty="0">
                           <a:solidFill>
                             <a:srgbClr val="1B1B1F"/>
                           </a:solidFill>
@@ -15795,7 +15795,7 @@
                         </a:rPr>
                         <a:t>Z</a:t>
                       </a:r>
-                      <a:endParaRPr lang="en-US" sz="1300" dirty="0">
+                      <a:endParaRPr lang="en-US" sz="1600" dirty="0">
                         <a:latin typeface="Calibri" charset="0"/>
                         <a:ea typeface="Calibri" charset="0"/>
                         <a:cs typeface="Calibri" charset="0"/>
@@ -15853,7 +15853,7 @@
                         <a:buNone/>
                       </a:pPr>
                       <a:r>
-                        <a:rPr lang="en-US" sz="1300" dirty="0">
+                        <a:rPr lang="en-US" sz="1600" dirty="0">
                           <a:solidFill>
                             <a:srgbClr val="1B1B1F"/>
                           </a:solidFill>
@@ -15863,7 +15863,7 @@
                         </a:rPr>
                         <a:t>L</a:t>
                       </a:r>
-                      <a:endParaRPr lang="en-US" sz="1300" dirty="0">
+                      <a:endParaRPr lang="en-US" sz="1600" dirty="0">
                         <a:latin typeface="Calibri" charset="0"/>
                         <a:ea typeface="Calibri" charset="0"/>
                         <a:cs typeface="Calibri" charset="0"/>
@@ -15921,7 +15921,7 @@
                         <a:buNone/>
                       </a:pPr>
                       <a:r>
-                        <a:rPr lang="en-US" sz="1300" dirty="0">
+                        <a:rPr lang="en-US" sz="1600" dirty="0">
                           <a:solidFill>
                             <a:srgbClr val="1B1B1F"/>
                           </a:solidFill>
@@ -15931,7 +15931,7 @@
                         </a:rPr>
                         <a:t>V</a:t>
                       </a:r>
-                      <a:endParaRPr lang="en-US" sz="1300" dirty="0">
+                      <a:endParaRPr lang="en-US" sz="1600" dirty="0">
                         <a:latin typeface="Calibri" charset="0"/>
                         <a:ea typeface="Calibri" charset="0"/>
                         <a:cs typeface="Calibri" charset="0"/>
@@ -15991,7 +15991,7 @@
                         <a:buNone/>
                       </a:pPr>
                       <a:r>
-                        <a:rPr lang="en-US" sz="1300" dirty="0">
+                        <a:rPr lang="en-US" sz="1600" dirty="0">
                           <a:solidFill>
                             <a:srgbClr val="1B1B1F"/>
                           </a:solidFill>
@@ -16001,7 +16001,7 @@
                         </a:rPr>
                         <a:t>− 7 / − 2</a:t>
                       </a:r>
-                      <a:endParaRPr lang="en-US" sz="1300" dirty="0">
+                      <a:endParaRPr lang="en-US" sz="1600" dirty="0">
                         <a:latin typeface="Calibri" charset="0"/>
                         <a:ea typeface="Calibri" charset="0"/>
                         <a:cs typeface="Calibri" charset="0"/>
@@ -16059,7 +16059,7 @@
                         <a:buNone/>
                       </a:pPr>
                       <a:r>
-                        <a:rPr lang="en-US" sz="1300" dirty="0">
+                        <a:rPr lang="en-US" sz="1600" dirty="0">
                           <a:solidFill>
                             <a:srgbClr val="1B1B1F"/>
                           </a:solidFill>
@@ -16069,7 +16069,7 @@
                         </a:rPr>
                         <a:t>R</a:t>
                       </a:r>
-                      <a:endParaRPr lang="en-US" sz="1300" dirty="0">
+                      <a:endParaRPr lang="en-US" sz="1600" dirty="0">
                         <a:latin typeface="Calibri" charset="0"/>
                         <a:ea typeface="Calibri" charset="0"/>
                         <a:cs typeface="Calibri" charset="0"/>
@@ -16127,7 +16127,7 @@
                         <a:buNone/>
                       </a:pPr>
                       <a:r>
-                        <a:rPr lang="en-US" sz="1300" dirty="0">
+                        <a:rPr lang="en-US" sz="1600" dirty="0">
                           <a:solidFill>
                             <a:srgbClr val="1B1B1F"/>
                           </a:solidFill>
@@ -16137,7 +16137,7 @@
                         </a:rPr>
                         <a:t>E</a:t>
                       </a:r>
-                      <a:endParaRPr lang="en-US" sz="1300" dirty="0">
+                      <a:endParaRPr lang="en-US" sz="1600" dirty="0">
                         <a:latin typeface="Calibri" charset="0"/>
                         <a:ea typeface="Calibri" charset="0"/>
                         <a:cs typeface="Calibri" charset="0"/>
@@ -16195,7 +16195,7 @@
                         <a:buNone/>
                       </a:pPr>
                       <a:r>
-                        <a:rPr lang="en-US" sz="1300" dirty="0">
+                        <a:rPr lang="en-US" sz="1600" dirty="0">
                           <a:solidFill>
                             <a:srgbClr val="1B1B1F"/>
                           </a:solidFill>
@@ -16205,7 +16205,7 @@
                         </a:rPr>
                         <a:t>T</a:t>
                       </a:r>
-                      <a:endParaRPr lang="en-US" sz="1300" dirty="0">
+                      <a:endParaRPr lang="en-US" sz="1600" dirty="0">
                         <a:latin typeface="Calibri" charset="0"/>
                         <a:ea typeface="Calibri" charset="0"/>
                         <a:cs typeface="Calibri" charset="0"/>
@@ -16263,7 +16263,7 @@
                         <a:buNone/>
                       </a:pPr>
                       <a:r>
-                        <a:rPr lang="en-US" sz="1300" dirty="0">
+                        <a:rPr lang="en-US" sz="1600" dirty="0">
                           <a:solidFill>
                             <a:srgbClr val="1B1B1F"/>
                           </a:solidFill>
@@ -16273,7 +16273,7 @@
                         </a:rPr>
                         <a:t>S</a:t>
                       </a:r>
-                      <a:endParaRPr lang="en-US" sz="1300" dirty="0">
+                      <a:endParaRPr lang="en-US" sz="1600" dirty="0">
                         <a:latin typeface="Calibri" charset="0"/>
                         <a:ea typeface="Calibri" charset="0"/>
                         <a:cs typeface="Calibri" charset="0"/>
@@ -16331,7 +16331,7 @@
                         <a:buNone/>
                       </a:pPr>
                       <a:r>
-                        <a:rPr lang="en-US" sz="1300" dirty="0">
+                        <a:rPr lang="en-US" sz="1600" dirty="0">
                           <a:solidFill>
                             <a:srgbClr val="1B1B1F"/>
                           </a:solidFill>
@@ -16341,7 +16341,7 @@
                         </a:rPr>
                         <a:t>R</a:t>
                       </a:r>
-                      <a:endParaRPr lang="en-US" sz="1300" dirty="0">
+                      <a:endParaRPr lang="en-US" sz="1600" dirty="0">
                         <a:latin typeface="Calibri" charset="0"/>
                         <a:ea typeface="Calibri" charset="0"/>
                         <a:cs typeface="Calibri" charset="0"/>
@@ -16399,7 +16399,7 @@
                         <a:buNone/>
                       </a:pPr>
                       <a:r>
-                        <a:rPr lang="en-US" sz="1300" dirty="0">
+                        <a:rPr lang="en-US" sz="1600" dirty="0">
                           <a:solidFill>
                             <a:srgbClr val="1B1B1F"/>
                           </a:solidFill>
@@ -16409,7 +16409,7 @@
                         </a:rPr>
                         <a:t>A</a:t>
                       </a:r>
-                      <a:endParaRPr lang="en-US" sz="1300" dirty="0">
+                      <a:endParaRPr lang="en-US" sz="1600" dirty="0">
                         <a:latin typeface="Calibri" charset="0"/>
                         <a:ea typeface="Calibri" charset="0"/>
                         <a:cs typeface="Calibri" charset="0"/>
@@ -16467,7 +16467,7 @@
                         <a:buNone/>
                       </a:pPr>
                       <a:r>
-                        <a:rPr lang="en-US" sz="1300" dirty="0">
+                        <a:rPr lang="en-US" sz="1600" dirty="0">
                           <a:solidFill>
                             <a:srgbClr val="1B1B1F"/>
                           </a:solidFill>
@@ -16477,7 +16477,7 @@
                         </a:rPr>
                         <a:t>W</a:t>
                       </a:r>
-                      <a:endParaRPr lang="en-US" sz="1300" dirty="0">
+                      <a:endParaRPr lang="en-US" sz="1600" dirty="0">
                         <a:latin typeface="Calibri" charset="0"/>
                         <a:ea typeface="Calibri" charset="0"/>
                         <a:cs typeface="Calibri" charset="0"/>
@@ -16535,7 +16535,7 @@
                         <a:buNone/>
                       </a:pPr>
                       <a:r>
-                        <a:rPr lang="en-US" sz="1300" dirty="0">
+                        <a:rPr lang="en-US" sz="1600" dirty="0">
                           <a:solidFill>
                             <a:srgbClr val="1B1B1F"/>
                           </a:solidFill>
@@ -16545,7 +16545,7 @@
                         </a:rPr>
                         <a:t>N</a:t>
                       </a:r>
-                      <a:endParaRPr lang="en-US" sz="1300" dirty="0">
+                      <a:endParaRPr lang="en-US" sz="1600" dirty="0">
                         <a:latin typeface="Calibri" charset="0"/>
                         <a:ea typeface="Calibri" charset="0"/>
                         <a:cs typeface="Calibri" charset="0"/>
@@ -16603,7 +16603,7 @@
                         <a:buNone/>
                       </a:pPr>
                       <a:r>
-                        <a:rPr lang="en-US" sz="1300" dirty="0">
+                        <a:rPr lang="en-US" sz="1600" dirty="0">
                           <a:solidFill>
                             <a:srgbClr val="1B1B1F"/>
                           </a:solidFill>
@@ -16613,7 +16613,7 @@
                         </a:rPr>
                         <a:t>X</a:t>
                       </a:r>
-                      <a:endParaRPr lang="en-US" sz="1300" dirty="0">
+                      <a:endParaRPr lang="en-US" sz="1600" dirty="0">
                         <a:latin typeface="Calibri" charset="0"/>
                         <a:ea typeface="Calibri" charset="0"/>
                         <a:cs typeface="Calibri" charset="0"/>
@@ -16671,7 +16671,7 @@
                         <a:buNone/>
                       </a:pPr>
                       <a:r>
-                        <a:rPr lang="en-US" sz="1300" dirty="0">
+                        <a:rPr lang="en-US" sz="1600" dirty="0">
                           <a:solidFill>
                             <a:srgbClr val="1B1B1F"/>
                           </a:solidFill>
@@ -16681,7 +16681,7 @@
                         </a:rPr>
                         <a:t>X</a:t>
                       </a:r>
-                      <a:endParaRPr lang="en-US" sz="1300" dirty="0">
+                      <a:endParaRPr lang="en-US" sz="1600" dirty="0">
                         <a:latin typeface="Calibri" charset="0"/>
                         <a:ea typeface="Calibri" charset="0"/>
                         <a:cs typeface="Calibri" charset="0"/>
@@ -16739,7 +16739,7 @@
                         <a:buNone/>
                       </a:pPr>
                       <a:r>
-                        <a:rPr lang="en-US" sz="1300" dirty="0">
+                        <a:rPr lang="en-US" sz="1600" dirty="0">
                           <a:solidFill>
                             <a:srgbClr val="1B1B1F"/>
                           </a:solidFill>
@@ -16749,7 +16749,7 @@
                         </a:rPr>
                         <a:t>E</a:t>
                       </a:r>
-                      <a:endParaRPr lang="en-US" sz="1300" dirty="0">
+                      <a:endParaRPr lang="en-US" sz="1600" dirty="0">
                         <a:latin typeface="Calibri" charset="0"/>
                         <a:ea typeface="Calibri" charset="0"/>
                         <a:cs typeface="Calibri" charset="0"/>
@@ -16807,7 +16807,7 @@
                         <a:buNone/>
                       </a:pPr>
                       <a:r>
-                        <a:rPr lang="en-US" sz="1300" dirty="0">
+                        <a:rPr lang="en-US" sz="1600" dirty="0">
                           <a:solidFill>
                             <a:srgbClr val="1B1B1F"/>
                           </a:solidFill>
@@ -16817,7 +16817,7 @@
                         </a:rPr>
                         <a:t>T</a:t>
                       </a:r>
-                      <a:endParaRPr lang="en-US" sz="1300" dirty="0">
+                      <a:endParaRPr lang="en-US" sz="1600" dirty="0">
                         <a:latin typeface="Calibri" charset="0"/>
                         <a:ea typeface="Calibri" charset="0"/>
                         <a:cs typeface="Calibri" charset="0"/>
@@ -16879,7 +16879,7 @@
         </p:nvSpPr>
         <p:spPr>
           <a:xfrm>
-            <a:off x="548640" y="2332482"/>
+            <a:off x="548640" y="2471928"/>
             <a:ext cx="7315200" cy="386588"/>
           </a:xfrm>
           <a:prstGeom prst="rect">
@@ -16931,7 +16931,7 @@
         </p:nvSpPr>
         <p:spPr>
           <a:xfrm>
-            <a:off x="548640" y="2847086"/>
+            <a:off x="548640" y="2986532"/>
             <a:ext cx="7315200" cy="386588"/>
           </a:xfrm>
           <a:prstGeom prst="rect">
@@ -16967,7 +16967,7 @@
         </p:nvSpPr>
         <p:spPr>
           <a:xfrm>
-            <a:off x="548640" y="3361690"/>
+            <a:off x="548640" y="3501136"/>
             <a:ext cx="7315200" cy="386588"/>
           </a:xfrm>
           <a:prstGeom prst="rect">
@@ -17131,7 +17131,7 @@
         <p:spPr>
           <a:xfrm>
             <a:off x="548640" y="1325880"/>
-            <a:ext cx="11094415" cy="432308"/>
+            <a:ext cx="7315200" cy="711200"/>
           </a:xfrm>
           <a:prstGeom prst="rect">
             <a:avLst/>
@@ -17147,14 +17147,14 @@
               <a:buNone/>
             </a:pPr>
             <a:r>
-              <a:rPr lang="en-US" sz="2200" dirty="0">
+              <a:rPr lang="en-US" sz="2000" dirty="0">
                 <a:solidFill>
                   <a:srgbClr val="1B1B1F"/>
                 </a:solidFill>
               </a:rPr>
               <a:t>Entschlüsseln = jeden Schritt invertieren, letzte Stufe zuerst.</a:t>
             </a:r>
-            <a:endParaRPr lang="en-US" sz="2200" dirty="0"/>
+            <a:endParaRPr lang="en-US" sz="2000" dirty="0"/>
           </a:p>
         </p:txBody>
       </p:sp>
@@ -17166,8 +17166,8 @@
         </p:nvSpPr>
         <p:spPr>
           <a:xfrm>
-            <a:off x="548640" y="1941068"/>
-            <a:ext cx="5364328" cy="2625344"/>
+            <a:off x="548640" y="2219960"/>
+            <a:ext cx="3474720" cy="2625344"/>
           </a:xfrm>
           <a:prstGeom prst="roundRect">
             <a:avLst>
@@ -17193,8 +17193,8 @@
         </p:nvSpPr>
         <p:spPr>
           <a:xfrm>
-            <a:off x="822960" y="2123948"/>
-            <a:ext cx="4815688" cy="365760"/>
+            <a:off x="822960" y="2402840"/>
+            <a:ext cx="2926080" cy="365760"/>
           </a:xfrm>
           <a:prstGeom prst="rect">
             <a:avLst/>
@@ -17229,8 +17229,8 @@
         </p:nvSpPr>
         <p:spPr>
           <a:xfrm>
-            <a:off x="822960" y="2626868"/>
-            <a:ext cx="4815688" cy="727456"/>
+            <a:off x="822960" y="2905760"/>
+            <a:ext cx="2926080" cy="727456"/>
           </a:xfrm>
           <a:prstGeom prst="rect">
             <a:avLst/>
@@ -17265,8 +17265,8 @@
         </p:nvSpPr>
         <p:spPr>
           <a:xfrm>
-            <a:off x="822960" y="3482340"/>
-            <a:ext cx="4815688" cy="727456"/>
+            <a:off x="822960" y="3761232"/>
+            <a:ext cx="2926080" cy="727456"/>
           </a:xfrm>
           <a:prstGeom prst="rect">
             <a:avLst/>
@@ -17317,12 +17317,12 @@
         </p:nvSpPr>
         <p:spPr>
           <a:xfrm>
-            <a:off x="6278728" y="1941068"/>
-            <a:ext cx="5364328" cy="2966212"/>
+            <a:off x="4389120" y="2219960"/>
+            <a:ext cx="3474720" cy="3647948"/>
           </a:xfrm>
           <a:prstGeom prst="roundRect">
             <a:avLst>
-              <a:gd name="adj" fmla="val 2466"/>
+              <a:gd name="adj" fmla="val 2105"/>
             </a:avLst>
           </a:prstGeom>
           <a:solidFill>
@@ -17344,8 +17344,8 @@
         </p:nvSpPr>
         <p:spPr>
           <a:xfrm>
-            <a:off x="6553048" y="2123948"/>
-            <a:ext cx="4815688" cy="365760"/>
+            <a:off x="4663440" y="2402840"/>
+            <a:ext cx="2926080" cy="365760"/>
           </a:xfrm>
           <a:prstGeom prst="rect">
             <a:avLst/>
@@ -17380,8 +17380,8 @@
         </p:nvSpPr>
         <p:spPr>
           <a:xfrm>
-            <a:off x="6553048" y="2626868"/>
-            <a:ext cx="4815688" cy="727456"/>
+            <a:off x="4663440" y="2905760"/>
+            <a:ext cx="2926080" cy="1068324"/>
           </a:xfrm>
           <a:prstGeom prst="rect">
             <a:avLst/>
@@ -17432,8 +17432,8 @@
         </p:nvSpPr>
         <p:spPr>
           <a:xfrm>
-            <a:off x="6553048" y="3482340"/>
-            <a:ext cx="4815688" cy="1068324"/>
+            <a:off x="4663440" y="4102100"/>
+            <a:ext cx="2926080" cy="1409192"/>
           </a:xfrm>
           <a:prstGeom prst="rect">
             <a:avLst/>
@@ -17608,7 +17608,7 @@
                         <a:buNone/>
                       </a:pPr>
                       <a:r>
-                        <a:rPr lang="en-US" sz="1600" b="1" dirty="0">
+                        <a:rPr lang="en-US" sz="1500" b="1" dirty="0">
                           <a:solidFill>
                             <a:srgbClr val="1B1B1F"/>
                           </a:solidFill>
@@ -17618,7 +17618,7 @@
                         </a:rPr>
                         <a:t>Stufe</a:t>
                       </a:r>
-                      <a:endParaRPr lang="en-US" sz="1600" dirty="0">
+                      <a:endParaRPr lang="en-US" sz="1500" dirty="0">
                         <a:latin typeface="Calibri" charset="0"/>
                         <a:ea typeface="Calibri" charset="0"/>
                         <a:cs typeface="Calibri" charset="0"/>
@@ -17676,7 +17676,7 @@
                         <a:buNone/>
                       </a:pPr>
                       <a:r>
-                        <a:rPr lang="en-US" sz="1600" b="1" dirty="0">
+                        <a:rPr lang="en-US" sz="1500" b="1" dirty="0">
                           <a:solidFill>
                             <a:srgbClr val="1B1B1F"/>
                           </a:solidFill>
@@ -17686,7 +17686,7 @@
                         </a:rPr>
                         <a:t>Einordnung</a:t>
                       </a:r>
-                      <a:endParaRPr lang="en-US" sz="1600" dirty="0">
+                      <a:endParaRPr lang="en-US" sz="1500" dirty="0">
                         <a:latin typeface="Calibri" charset="0"/>
                         <a:ea typeface="Calibri" charset="0"/>
                         <a:cs typeface="Calibri" charset="0"/>
@@ -17744,7 +17744,7 @@
                         <a:buNone/>
                       </a:pPr>
                       <a:r>
-                        <a:rPr lang="en-US" sz="1600" b="1" dirty="0">
+                        <a:rPr lang="en-US" sz="1500" b="1" dirty="0">
                           <a:solidFill>
                             <a:srgbClr val="1B1B1F"/>
                           </a:solidFill>
@@ -17754,7 +17754,7 @@
                         </a:rPr>
                         <a:t>Begründung</a:t>
                       </a:r>
-                      <a:endParaRPr lang="en-US" sz="1600" dirty="0">
+                      <a:endParaRPr lang="en-US" sz="1500" dirty="0">
                         <a:latin typeface="Calibri" charset="0"/>
                         <a:ea typeface="Calibri" charset="0"/>
                         <a:cs typeface="Calibri" charset="0"/>
@@ -17814,7 +17814,7 @@
                         <a:buNone/>
                       </a:pPr>
                       <a:r>
-                        <a:rPr lang="en-US" sz="1600" dirty="0">
+                        <a:rPr lang="en-US" sz="1500" dirty="0">
                           <a:solidFill>
                             <a:srgbClr val="1B1B1F"/>
                           </a:solidFill>
@@ -17824,7 +17824,7 @@
                         </a:rPr>
                         <a:t>1 Blockwende</a:t>
                       </a:r>
-                      <a:endParaRPr lang="en-US" sz="1600" dirty="0">
+                      <a:endParaRPr lang="en-US" sz="1500" dirty="0">
                         <a:latin typeface="Calibri" charset="0"/>
                         <a:ea typeface="Calibri" charset="0"/>
                         <a:cs typeface="Calibri" charset="0"/>
@@ -17882,7 +17882,7 @@
                         <a:buNone/>
                       </a:pPr>
                       <a:r>
-                        <a:rPr lang="en-US" sz="1600" b="1" dirty="0">
+                        <a:rPr lang="en-US" sz="1500" b="1" dirty="0">
                           <a:solidFill>
                             <a:srgbClr val="1B1B1F"/>
                           </a:solidFill>
@@ -17892,7 +17892,7 @@
                         </a:rPr>
                         <a:t>Transposition</a:t>
                       </a:r>
-                      <a:endParaRPr lang="en-US" sz="1600" dirty="0">
+                      <a:endParaRPr lang="en-US" sz="1500" dirty="0">
                         <a:latin typeface="Calibri" charset="0"/>
                         <a:ea typeface="Calibri" charset="0"/>
                         <a:cs typeface="Calibri" charset="0"/>
@@ -17950,7 +17950,7 @@
                         <a:buNone/>
                       </a:pPr>
                       <a:r>
-                        <a:rPr lang="en-US" sz="1600" dirty="0">
+                        <a:rPr lang="en-US" sz="1500" dirty="0">
                           <a:solidFill>
                             <a:srgbClr val="1B1B1F"/>
                           </a:solidFill>
@@ -17960,7 +17960,7 @@
                         </a:rPr>
                         <a:t>Buchstaben bleiben, nur ihre Positionen ändern sich; ohne Schlüssel</a:t>
                       </a:r>
-                      <a:endParaRPr lang="en-US" sz="1600" dirty="0">
+                      <a:endParaRPr lang="en-US" sz="1500" dirty="0">
                         <a:latin typeface="Calibri" charset="0"/>
                         <a:ea typeface="Calibri" charset="0"/>
                         <a:cs typeface="Calibri" charset="0"/>
@@ -18020,7 +18020,7 @@
                         <a:buNone/>
                       </a:pPr>
                       <a:r>
-                        <a:rPr lang="en-US" sz="1600" dirty="0">
+                        <a:rPr lang="en-US" sz="1500" dirty="0">
                           <a:solidFill>
                             <a:srgbClr val="1B1B1F"/>
                           </a:solidFill>
@@ -18030,7 +18030,7 @@
                         </a:rPr>
                         <a:t>2 Schaukel</a:t>
                       </a:r>
-                      <a:endParaRPr lang="en-US" sz="1600" dirty="0">
+                      <a:endParaRPr lang="en-US" sz="1500" dirty="0">
                         <a:latin typeface="Calibri" charset="0"/>
                         <a:ea typeface="Calibri" charset="0"/>
                         <a:cs typeface="Calibri" charset="0"/>
@@ -18088,7 +18088,7 @@
                         <a:buNone/>
                       </a:pPr>
                       <a:r>
-                        <a:rPr lang="en-US" sz="1600" b="1" dirty="0">
+                        <a:rPr lang="en-US" sz="1500" b="1" dirty="0">
                           <a:solidFill>
                             <a:srgbClr val="1B1B1F"/>
                           </a:solidFill>
@@ -18098,7 +18098,7 @@
                         </a:rPr>
                         <a:t>polyalphabetische Substitution</a:t>
                       </a:r>
-                      <a:endParaRPr lang="en-US" sz="1600" dirty="0">
+                      <a:endParaRPr lang="en-US" sz="1500" dirty="0">
                         <a:latin typeface="Calibri" charset="0"/>
                         <a:ea typeface="Calibri" charset="0"/>
                         <a:cs typeface="Calibri" charset="0"/>
@@ -18156,7 +18156,7 @@
                         <a:buNone/>
                       </a:pPr>
                       <a:r>
-                        <a:rPr lang="en-US" sz="1600" dirty="0">
+                        <a:rPr lang="en-US" sz="1500" dirty="0">
                           <a:solidFill>
                             <a:srgbClr val="1B1B1F"/>
                           </a:solidFill>
@@ -18166,7 +18166,7 @@
                         </a:rPr>
                         <a:t>A wird an Pos. 2 zu E, an Pos. 5 zu L – je nach Position anders</a:t>
                       </a:r>
-                      <a:endParaRPr lang="en-US" sz="1600" dirty="0">
+                      <a:endParaRPr lang="en-US" sz="1500" dirty="0">
                         <a:latin typeface="Calibri" charset="0"/>
                         <a:ea typeface="Calibri" charset="0"/>
                         <a:cs typeface="Calibri" charset="0"/>
@@ -18226,7 +18226,7 @@
                         <a:buNone/>
                       </a:pPr>
                       <a:r>
-                        <a:rPr lang="en-US" sz="1600" dirty="0">
+                        <a:rPr lang="en-US" sz="1500" dirty="0">
                           <a:solidFill>
                             <a:srgbClr val="1B1B1F"/>
                           </a:solidFill>
@@ -18236,7 +18236,7 @@
                         </a:rPr>
                         <a:t>Sonderfall s = t</a:t>
                       </a:r>
-                      <a:endParaRPr lang="en-US" sz="1600" dirty="0">
+                      <a:endParaRPr lang="en-US" sz="1500" dirty="0">
                         <a:latin typeface="Calibri" charset="0"/>
                         <a:ea typeface="Calibri" charset="0"/>
                         <a:cs typeface="Calibri" charset="0"/>
@@ -18294,7 +18294,7 @@
                         <a:buNone/>
                       </a:pPr>
                       <a:r>
-                        <a:rPr lang="en-US" sz="1600" dirty="0">
+                        <a:rPr lang="en-US" sz="1500" dirty="0">
                           <a:solidFill>
                             <a:srgbClr val="1B1B1F"/>
                           </a:solidFill>
@@ -18304,7 +18304,7 @@
                         </a:rPr>
                         <a:t>monoalphabetisch</a:t>
                       </a:r>
-                      <a:endParaRPr lang="en-US" sz="1600" dirty="0">
+                      <a:endParaRPr lang="en-US" sz="1500" dirty="0">
                         <a:latin typeface="Calibri" charset="0"/>
                         <a:ea typeface="Calibri" charset="0"/>
                         <a:cs typeface="Calibri" charset="0"/>
@@ -18362,7 +18362,7 @@
                         <a:buNone/>
                       </a:pPr>
                       <a:r>
-                        <a:rPr lang="en-US" sz="1600" dirty="0">
+                        <a:rPr lang="en-US" sz="1500" dirty="0">
                           <a:solidFill>
                             <a:srgbClr val="1B1B1F"/>
                           </a:solidFill>
@@ -18372,7 +18372,7 @@
                         </a:rPr>
                         <a:t>jede Position gleich verschoben</a:t>
                       </a:r>
-                      <a:endParaRPr lang="en-US" sz="1600" dirty="0">
+                      <a:endParaRPr lang="en-US" sz="1500" dirty="0">
                         <a:latin typeface="Calibri" charset="0"/>
                         <a:ea typeface="Calibri" charset="0"/>
                         <a:cs typeface="Calibri" charset="0"/>
@@ -18432,7 +18432,7 @@
                         <a:buNone/>
                       </a:pPr>
                       <a:r>
-                        <a:rPr lang="en-US" sz="1600" dirty="0">
+                        <a:rPr lang="en-US" sz="1500" dirty="0">
                           <a:solidFill>
                             <a:srgbClr val="1B1B1F"/>
                           </a:solidFill>
@@ -18442,7 +18442,7 @@
                         </a:rPr>
                         <a:t>gesamt</a:t>
                       </a:r>
-                      <a:endParaRPr lang="en-US" sz="1600" dirty="0">
+                      <a:endParaRPr lang="en-US" sz="1500" dirty="0">
                         <a:latin typeface="Calibri" charset="0"/>
                         <a:ea typeface="Calibri" charset="0"/>
                         <a:cs typeface="Calibri" charset="0"/>
@@ -18500,7 +18500,7 @@
                         <a:buNone/>
                       </a:pPr>
                       <a:r>
-                        <a:rPr lang="en-US" sz="1600" b="1" dirty="0">
+                        <a:rPr lang="en-US" sz="1500" b="1" dirty="0">
                           <a:solidFill>
                             <a:srgbClr val="1B1B1F"/>
                           </a:solidFill>
@@ -18510,7 +18510,7 @@
                         </a:rPr>
                         <a:t>symmetrisch</a:t>
                       </a:r>
-                      <a:endParaRPr lang="en-US" sz="1600" dirty="0">
+                      <a:endParaRPr lang="en-US" sz="1500" dirty="0">
                         <a:latin typeface="Calibri" charset="0"/>
                         <a:ea typeface="Calibri" charset="0"/>
                         <a:cs typeface="Calibri" charset="0"/>
@@ -18568,7 +18568,7 @@
                         <a:buNone/>
                       </a:pPr>
                       <a:r>
-                        <a:rPr lang="en-US" sz="1600" dirty="0">
+                        <a:rPr lang="en-US" sz="1500" dirty="0">
                           <a:solidFill>
                             <a:srgbClr val="1B1B1F"/>
                           </a:solidFill>
@@ -18578,7 +18578,7 @@
                         </a:rPr>
                         <a:t>derselbe Schlüssel (s, t) ver- und entschlüsselt</a:t>
                       </a:r>
-                      <a:endParaRPr lang="en-US" sz="1600" dirty="0">
+                      <a:endParaRPr lang="en-US" sz="1500" dirty="0">
                         <a:latin typeface="Calibri" charset="0"/>
                         <a:ea typeface="Calibri" charset="0"/>
                         <a:cs typeface="Calibri" charset="0"/>
@@ -18640,7 +18640,7 @@
         </p:nvSpPr>
         <p:spPr>
           <a:xfrm>
-            <a:off x="548640" y="4390136"/>
+            <a:off x="548640" y="4002786"/>
             <a:ext cx="7315200" cy="727456"/>
           </a:xfrm>
           <a:prstGeom prst="rect">
